--- a/docs/prezentacja/ZCO-DM-prezentacja.pptx
+++ b/docs/prezentacja/ZCO-DM-prezentacja.pptx
@@ -4,20 +4,23 @@
   <p:sldMasterIdLst>
     <p:sldMasterId id="2147483648" r:id="rId1"/>
   </p:sldMasterIdLst>
+  <p:notesMasterIdLst>
+    <p:notesMasterId r:id="rId13"/>
+  </p:notesMasterIdLst>
   <p:sldIdLst>
-    <p:sldId id="256" r:id="rId7"/>
-    <p:sldId id="257" r:id="rId8"/>
-    <p:sldId id="258" r:id="rId10"/>
-    <p:sldId id="259" r:id="rId11"/>
-    <p:sldId id="260" r:id="rId12"/>
-    <p:sldId id="261" r:id="rId13"/>
-    <p:sldId id="262" r:id="rId14"/>
-    <p:sldId id="263" r:id="rId15"/>
-    <p:sldId id="264" r:id="rId16"/>
-    <p:sldId id="265" r:id="rId17"/>
-    <p:sldId id="266" r:id="rId18"/>
+    <p:sldId id="256" r:id="rId2"/>
+    <p:sldId id="257" r:id="rId3"/>
+    <p:sldId id="258" r:id="rId4"/>
+    <p:sldId id="259" r:id="rId5"/>
+    <p:sldId id="260" r:id="rId6"/>
+    <p:sldId id="261" r:id="rId7"/>
+    <p:sldId id="262" r:id="rId8"/>
+    <p:sldId id="263" r:id="rId9"/>
+    <p:sldId id="264" r:id="rId10"/>
+    <p:sldId id="265" r:id="rId11"/>
+    <p:sldId id="266" r:id="rId12"/>
   </p:sldIdLst>
-  <p:sldSz cx="12192000" cy="6858000" type="screen4x3"/>
+  <p:sldSz cx="12192000" cy="6858000"/>
   <p:notesSz cx="6858000" cy="9144000"/>
   <p:defaultTextStyle>
     <a:defPPr>
@@ -114,11 +117,27 @@
       </a:defRPr>
     </a:lvl9pPr>
   </p:defaultTextStyle>
+  <p:extLst>
+    <p:ext uri="{EFAFB233-063F-42B5-8137-9DF3F51BA10A}">
+      <p15:sldGuideLst xmlns:p15="http://schemas.microsoft.com/office/powerpoint/2012/main">
+        <p15:guide id="1" orient="horz" pos="2160">
+          <p15:clr>
+            <a:srgbClr val="A4A3A4"/>
+          </p15:clr>
+        </p15:guide>
+        <p15:guide id="2" pos="2880">
+          <p15:clr>
+            <a:srgbClr val="A4A3A4"/>
+          </p15:clr>
+        </p15:guide>
+      </p15:sldGuideLst>
+    </p:ext>
+  </p:extLst>
 </p:presentation>
 </file>
 
 <file path=ppt/notesMasters/notesMaster1.xml><?xml version="1.0" encoding="utf-8"?>
-<p:notesMaster xmlns:a="http://schemas.openxmlformats.org/drawingml/2006/main" xmlns:p="http://schemas.openxmlformats.org/presentationml/2006/main" xmlns:r="http://schemas.openxmlformats.org/officeDocument/2006/relationships">
+<p:notesMaster xmlns:a="http://schemas.openxmlformats.org/drawingml/2006/main" xmlns:r="http://schemas.openxmlformats.org/officeDocument/2006/relationships" xmlns:p="http://schemas.openxmlformats.org/presentationml/2006/main">
   <p:cSld>
     <p:bg>
       <p:bgRef idx="1001">
@@ -141,7 +160,7 @@
       </p:grpSpPr>
       <p:sp>
         <p:nvSpPr>
-          <p:cNvPr id="2" name="Header Placeholder 1"/>
+          <p:cNvPr id="2" name="Symbol zastępczy nagłówka 1"/>
           <p:cNvSpPr>
             <a:spLocks noGrp="1"/>
           </p:cNvSpPr>
@@ -152,7 +171,7 @@
         <p:spPr>
           <a:xfrm>
             <a:off x="0" y="0"/>
-            <a:ext cx="2971800" cy="457200"/>
+            <a:ext cx="2971800" cy="458788"/>
           </a:xfrm>
           <a:prstGeom prst="rect">
             <a:avLst/>
@@ -166,13 +185,13 @@
             </a:lvl1pPr>
           </a:lstStyle>
           <a:p>
-            <a:endParaRPr lang="en-US"/>
-          </a:p>
-        </p:txBody>
-      </p:sp>
-      <p:sp>
-        <p:nvSpPr>
-          <p:cNvPr id="3" name="Date Placeholder 2"/>
+            <a:endParaRPr lang="pl-PL"/>
+          </a:p>
+        </p:txBody>
+      </p:sp>
+      <p:sp>
+        <p:nvSpPr>
+          <p:cNvPr id="3" name="Symbol zastępczy daty 2"/>
           <p:cNvSpPr>
             <a:spLocks noGrp="1"/>
           </p:cNvSpPr>
@@ -183,7 +202,7 @@
         <p:spPr>
           <a:xfrm>
             <a:off x="3884613" y="0"/>
-            <a:ext cx="2971800" cy="457200"/>
+            <a:ext cx="2971800" cy="458788"/>
           </a:xfrm>
           <a:prstGeom prst="rect">
             <a:avLst/>
@@ -197,17 +216,17 @@
             </a:lvl1pPr>
           </a:lstStyle>
           <a:p>
-            <a:fld id="{0F89C1C7-3DCD-1040-A9CF-14679D8B5DDD}" type="datetimeFigureOut">
-              <a:rPr lang="en-US" smtClean="0"/>
-              <a:t>10/17/16</a:t>
+            <a:fld id="{E3A30EEE-10FC-4B65-BFC9-AE1422590B2D}" type="datetimeFigureOut">
+              <a:rPr lang="pl-PL" smtClean="0"/>
+              <a:t>30.07.2026</a:t>
             </a:fld>
-            <a:endParaRPr lang="en-US"/>
-          </a:p>
-        </p:txBody>
-      </p:sp>
-      <p:sp>
-        <p:nvSpPr>
-          <p:cNvPr id="4" name="Slide Image Placeholder 3"/>
+            <a:endParaRPr lang="pl-PL"/>
+          </a:p>
+        </p:txBody>
+      </p:sp>
+      <p:sp>
+        <p:nvSpPr>
+          <p:cNvPr id="4" name="Symbol zastępczy obrazu slajdu 3"/>
           <p:cNvSpPr>
             <a:spLocks noGrp="1" noRot="1" noChangeAspect="1"/>
           </p:cNvSpPr>
@@ -217,8 +236,8 @@
         </p:nvSpPr>
         <p:spPr>
           <a:xfrm>
-            <a:off x="1143000" y="685800"/>
-            <a:ext cx="4572000" cy="3429000"/>
+            <a:off x="685800" y="1143000"/>
+            <a:ext cx="5486400" cy="3086100"/>
           </a:xfrm>
           <a:prstGeom prst="rect">
             <a:avLst/>
@@ -234,13 +253,13 @@
           <a:bodyPr vert="horz" lIns="91440" tIns="45720" rIns="91440" bIns="45720" rtlCol="0" anchor="ctr"/>
           <a:lstStyle/>
           <a:p>
-            <a:endParaRPr lang="en-US"/>
-          </a:p>
-        </p:txBody>
-      </p:sp>
-      <p:sp>
-        <p:nvSpPr>
-          <p:cNvPr id="5" name="Notes Placeholder 4"/>
+            <a:endParaRPr lang="pl-PL"/>
+          </a:p>
+        </p:txBody>
+      </p:sp>
+      <p:sp>
+        <p:nvSpPr>
+          <p:cNvPr id="5" name="Symbol zastępczy notatek 4"/>
           <p:cNvSpPr>
             <a:spLocks noGrp="1"/>
           </p:cNvSpPr>
@@ -250,8 +269,8 @@
         </p:nvSpPr>
         <p:spPr>
           <a:xfrm>
-            <a:off x="685800" y="4343400"/>
-            <a:ext cx="5486400" cy="4114800"/>
+            <a:off x="685800" y="4400550"/>
+            <a:ext cx="5486400" cy="3600450"/>
           </a:xfrm>
           <a:prstGeom prst="rect">
             <a:avLst/>
@@ -263,44 +282,43 @@
           <a:p>
             <a:pPr lvl="0"/>
             <a:r>
-              <a:rPr lang="en-US" smtClean="0"/>
-              <a:t>Click to edit Master text styles</a:t>
+              <a:rPr lang="pl-PL"/>
+              <a:t>Kliknij, aby edytować style wzorca tekstu</a:t>
             </a:r>
           </a:p>
           <a:p>
             <a:pPr lvl="1"/>
             <a:r>
-              <a:rPr lang="en-US" smtClean="0"/>
-              <a:t>Second level</a:t>
+              <a:rPr lang="pl-PL"/>
+              <a:t>Drugi poziom</a:t>
             </a:r>
           </a:p>
           <a:p>
             <a:pPr lvl="2"/>
             <a:r>
-              <a:rPr lang="en-US" smtClean="0"/>
-              <a:t>Third level</a:t>
+              <a:rPr lang="pl-PL"/>
+              <a:t>Trzeci poziom</a:t>
             </a:r>
           </a:p>
           <a:p>
             <a:pPr lvl="3"/>
             <a:r>
-              <a:rPr lang="en-US" smtClean="0"/>
-              <a:t>Fourth level</a:t>
+              <a:rPr lang="pl-PL"/>
+              <a:t>Czwarty poziom</a:t>
             </a:r>
           </a:p>
           <a:p>
             <a:pPr lvl="4"/>
             <a:r>
-              <a:rPr lang="en-US" smtClean="0"/>
-              <a:t>Fifth level</a:t>
-            </a:r>
-            <a:endParaRPr lang="en-US"/>
-          </a:p>
-        </p:txBody>
-      </p:sp>
-      <p:sp>
-        <p:nvSpPr>
-          <p:cNvPr id="6" name="Footer Placeholder 5"/>
+              <a:rPr lang="pl-PL"/>
+              <a:t>Piąty poziom</a:t>
+            </a:r>
+          </a:p>
+        </p:txBody>
+      </p:sp>
+      <p:sp>
+        <p:nvSpPr>
+          <p:cNvPr id="6" name="Symbol zastępczy stopki 5"/>
           <p:cNvSpPr>
             <a:spLocks noGrp="1"/>
           </p:cNvSpPr>
@@ -311,7 +329,7 @@
         <p:spPr>
           <a:xfrm>
             <a:off x="0" y="8685213"/>
-            <a:ext cx="2971800" cy="457200"/>
+            <a:ext cx="2971800" cy="458787"/>
           </a:xfrm>
           <a:prstGeom prst="rect">
             <a:avLst/>
@@ -325,13 +343,13 @@
             </a:lvl1pPr>
           </a:lstStyle>
           <a:p>
-            <a:endParaRPr lang="en-US"/>
-          </a:p>
-        </p:txBody>
-      </p:sp>
-      <p:sp>
-        <p:nvSpPr>
-          <p:cNvPr id="7" name="Slide Number Placeholder 6"/>
+            <a:endParaRPr lang="pl-PL"/>
+          </a:p>
+        </p:txBody>
+      </p:sp>
+      <p:sp>
+        <p:nvSpPr>
+          <p:cNvPr id="7" name="Symbol zastępczy numeru slajdu 6"/>
           <p:cNvSpPr>
             <a:spLocks noGrp="1"/>
           </p:cNvSpPr>
@@ -342,7 +360,7 @@
         <p:spPr>
           <a:xfrm>
             <a:off x="3884613" y="8685213"/>
-            <a:ext cx="2971800" cy="457200"/>
+            <a:ext cx="2971800" cy="458787"/>
           </a:xfrm>
           <a:prstGeom prst="rect">
             <a:avLst/>
@@ -356,24 +374,24 @@
             </a:lvl1pPr>
           </a:lstStyle>
           <a:p>
-            <a:fld id="{BB5E49A5-4136-284D-997B-48E1D791AD67}" type="slidenum">
-              <a:rPr lang="en-US" smtClean="0"/>
+            <a:fld id="{8A8CEC45-6452-453C-BF24-70839C0FD371}" type="slidenum">
+              <a:rPr lang="pl-PL" smtClean="0"/>
               <a:t>‹#›</a:t>
             </a:fld>
-            <a:endParaRPr lang="en-US"/>
+            <a:endParaRPr lang="pl-PL"/>
           </a:p>
         </p:txBody>
       </p:sp>
     </p:spTree>
     <p:extLst>
       <p:ext uri="{BB962C8B-B14F-4D97-AF65-F5344CB8AC3E}">
-        <p14:creationId xmlns:p14="http://schemas.microsoft.com/office/powerpoint/2010/main" val="2623252185"/>
+        <p14:creationId xmlns:p14="http://schemas.microsoft.com/office/powerpoint/2010/main" val="1657405123"/>
       </p:ext>
     </p:extLst>
   </p:cSld>
   <p:clrMap bg1="lt1" tx1="dk1" bg2="lt2" tx2="dk2" accent1="accent1" accent2="accent2" accent3="accent3" accent4="accent4" accent5="accent5" accent6="accent6" hlink="hlink" folHlink="folHlink"/>
   <p:notesStyle>
-    <a:lvl1pPr marL="0" algn="l" defTabSz="457200" rtl="0" eaLnBrk="1" latinLnBrk="0" hangingPunct="1">
+    <a:lvl1pPr marL="0" algn="l" defTabSz="914400" rtl="0" eaLnBrk="1" latinLnBrk="0" hangingPunct="1">
       <a:defRPr sz="1200" kern="1200">
         <a:solidFill>
           <a:schemeClr val="tx1"/>
@@ -383,7 +401,7 @@
         <a:cs typeface="+mn-cs"/>
       </a:defRPr>
     </a:lvl1pPr>
-    <a:lvl2pPr marL="457200" algn="l" defTabSz="457200" rtl="0" eaLnBrk="1" latinLnBrk="0" hangingPunct="1">
+    <a:lvl2pPr marL="457200" algn="l" defTabSz="914400" rtl="0" eaLnBrk="1" latinLnBrk="0" hangingPunct="1">
       <a:defRPr sz="1200" kern="1200">
         <a:solidFill>
           <a:schemeClr val="tx1"/>
@@ -393,7 +411,7 @@
         <a:cs typeface="+mn-cs"/>
       </a:defRPr>
     </a:lvl2pPr>
-    <a:lvl3pPr marL="914400" algn="l" defTabSz="457200" rtl="0" eaLnBrk="1" latinLnBrk="0" hangingPunct="1">
+    <a:lvl3pPr marL="914400" algn="l" defTabSz="914400" rtl="0" eaLnBrk="1" latinLnBrk="0" hangingPunct="1">
       <a:defRPr sz="1200" kern="1200">
         <a:solidFill>
           <a:schemeClr val="tx1"/>
@@ -403,7 +421,7 @@
         <a:cs typeface="+mn-cs"/>
       </a:defRPr>
     </a:lvl3pPr>
-    <a:lvl4pPr marL="1371600" algn="l" defTabSz="457200" rtl="0" eaLnBrk="1" latinLnBrk="0" hangingPunct="1">
+    <a:lvl4pPr marL="1371600" algn="l" defTabSz="914400" rtl="0" eaLnBrk="1" latinLnBrk="0" hangingPunct="1">
       <a:defRPr sz="1200" kern="1200">
         <a:solidFill>
           <a:schemeClr val="tx1"/>
@@ -413,7 +431,7 @@
         <a:cs typeface="+mn-cs"/>
       </a:defRPr>
     </a:lvl4pPr>
-    <a:lvl5pPr marL="1828800" algn="l" defTabSz="457200" rtl="0" eaLnBrk="1" latinLnBrk="0" hangingPunct="1">
+    <a:lvl5pPr marL="1828800" algn="l" defTabSz="914400" rtl="0" eaLnBrk="1" latinLnBrk="0" hangingPunct="1">
       <a:defRPr sz="1200" kern="1200">
         <a:solidFill>
           <a:schemeClr val="tx1"/>
@@ -423,7 +441,7 @@
         <a:cs typeface="+mn-cs"/>
       </a:defRPr>
     </a:lvl5pPr>
-    <a:lvl6pPr marL="2286000" algn="l" defTabSz="457200" rtl="0" eaLnBrk="1" latinLnBrk="0" hangingPunct="1">
+    <a:lvl6pPr marL="2286000" algn="l" defTabSz="914400" rtl="0" eaLnBrk="1" latinLnBrk="0" hangingPunct="1">
       <a:defRPr sz="1200" kern="1200">
         <a:solidFill>
           <a:schemeClr val="tx1"/>
@@ -433,7 +451,7 @@
         <a:cs typeface="+mn-cs"/>
       </a:defRPr>
     </a:lvl6pPr>
-    <a:lvl7pPr marL="2743200" algn="l" defTabSz="457200" rtl="0" eaLnBrk="1" latinLnBrk="0" hangingPunct="1">
+    <a:lvl7pPr marL="2743200" algn="l" defTabSz="914400" rtl="0" eaLnBrk="1" latinLnBrk="0" hangingPunct="1">
       <a:defRPr sz="1200" kern="1200">
         <a:solidFill>
           <a:schemeClr val="tx1"/>
@@ -443,7 +461,7 @@
         <a:cs typeface="+mn-cs"/>
       </a:defRPr>
     </a:lvl7pPr>
-    <a:lvl8pPr marL="3200400" algn="l" defTabSz="457200" rtl="0" eaLnBrk="1" latinLnBrk="0" hangingPunct="1">
+    <a:lvl8pPr marL="3200400" algn="l" defTabSz="914400" rtl="0" eaLnBrk="1" latinLnBrk="0" hangingPunct="1">
       <a:defRPr sz="1200" kern="1200">
         <a:solidFill>
           <a:schemeClr val="tx1"/>
@@ -453,7 +471,7 @@
         <a:cs typeface="+mn-cs"/>
       </a:defRPr>
     </a:lvl8pPr>
-    <a:lvl9pPr marL="3657600" algn="l" defTabSz="457200" rtl="0" eaLnBrk="1" latinLnBrk="0" hangingPunct="1">
+    <a:lvl9pPr marL="3657600" algn="l" defTabSz="914400" rtl="0" eaLnBrk="1" latinLnBrk="0" hangingPunct="1">
       <a:defRPr sz="1200" kern="1200">
         <a:solidFill>
           <a:schemeClr val="tx1"/>
@@ -468,7 +486,7 @@
 </file>
 
 <file path=ppt/notesSlides/notesSlide1.xml><?xml version="1.0" encoding="utf-8"?>
-<p:notes xmlns:a="http://schemas.openxmlformats.org/drawingml/2006/main" xmlns:p="http://schemas.openxmlformats.org/presentationml/2006/main" xmlns:r="http://schemas.openxmlformats.org/officeDocument/2006/relationships">
+<p:notes xmlns:a="http://schemas.openxmlformats.org/drawingml/2006/main" xmlns:r="http://schemas.openxmlformats.org/officeDocument/2006/relationships" xmlns:p="http://schemas.openxmlformats.org/presentationml/2006/main">
   <p:cSld>
     <p:spTree>
       <p:nvGrpSpPr>
@@ -488,7 +506,7 @@
         <p:nvSpPr>
           <p:cNvPr id="2" name="Slide Image Placeholder 1"/>
           <p:cNvSpPr>
-            <a:spLocks noGrp="1"/>
+            <a:spLocks noGrp="1" noRot="1" noChangeAspect="1"/>
           </p:cNvSpPr>
           <p:nvPr>
             <p:ph type="sldImg" idx="2"/>
@@ -503,7 +521,7 @@
             <a:spLocks noGrp="1"/>
           </p:cNvSpPr>
           <p:nvPr>
-            <p:ph type="body" idx="3" sz="quarter"/>
+            <p:ph type="body" sz="quarter" idx="3"/>
           </p:nvPr>
         </p:nvSpPr>
         <p:spPr/>
@@ -524,7 +542,7 @@
             <a:spLocks noGrp="1"/>
           </p:cNvSpPr>
           <p:nvPr>
-            <p:ph type="sldNum" idx="5" sz="quarter"/>
+            <p:ph type="sldNum" sz="quarter" idx="5"/>
           </p:nvPr>
         </p:nvSpPr>
         <p:spPr/>
@@ -538,7 +556,7 @@
 </file>
 
 <file path=ppt/notesSlides/notesSlide10.xml><?xml version="1.0" encoding="utf-8"?>
-<p:notes xmlns:a="http://schemas.openxmlformats.org/drawingml/2006/main" xmlns:p="http://schemas.openxmlformats.org/presentationml/2006/main" xmlns:r="http://schemas.openxmlformats.org/officeDocument/2006/relationships">
+<p:notes xmlns:a="http://schemas.openxmlformats.org/drawingml/2006/main" xmlns:r="http://schemas.openxmlformats.org/officeDocument/2006/relationships" xmlns:p="http://schemas.openxmlformats.org/presentationml/2006/main">
   <p:cSld>
     <p:spTree>
       <p:nvGrpSpPr>
@@ -558,7 +576,7 @@
         <p:nvSpPr>
           <p:cNvPr id="2" name="Slide Image Placeholder 1"/>
           <p:cNvSpPr>
-            <a:spLocks noGrp="1"/>
+            <a:spLocks noGrp="1" noRot="1" noChangeAspect="1"/>
           </p:cNvSpPr>
           <p:nvPr>
             <p:ph type="sldImg" idx="2"/>
@@ -573,7 +591,7 @@
             <a:spLocks noGrp="1"/>
           </p:cNvSpPr>
           <p:nvPr>
-            <p:ph type="body" idx="3" sz="quarter"/>
+            <p:ph type="body" sz="quarter" idx="3"/>
           </p:nvPr>
         </p:nvSpPr>
         <p:spPr/>
@@ -594,7 +612,7 @@
             <a:spLocks noGrp="1"/>
           </p:cNvSpPr>
           <p:nvPr>
-            <p:ph type="sldNum" idx="5" sz="quarter"/>
+            <p:ph type="sldNum" sz="quarter" idx="5"/>
           </p:nvPr>
         </p:nvSpPr>
         <p:spPr/>
@@ -608,7 +626,7 @@
 </file>
 
 <file path=ppt/notesSlides/notesSlide2.xml><?xml version="1.0" encoding="utf-8"?>
-<p:notes xmlns:a="http://schemas.openxmlformats.org/drawingml/2006/main" xmlns:p="http://schemas.openxmlformats.org/presentationml/2006/main" xmlns:r="http://schemas.openxmlformats.org/officeDocument/2006/relationships">
+<p:notes xmlns:a="http://schemas.openxmlformats.org/drawingml/2006/main" xmlns:r="http://schemas.openxmlformats.org/officeDocument/2006/relationships" xmlns:p="http://schemas.openxmlformats.org/presentationml/2006/main">
   <p:cSld>
     <p:spTree>
       <p:nvGrpSpPr>
@@ -628,7 +646,7 @@
         <p:nvSpPr>
           <p:cNvPr id="2" name="Slide Image Placeholder 1"/>
           <p:cNvSpPr>
-            <a:spLocks noGrp="1"/>
+            <a:spLocks noGrp="1" noRot="1" noChangeAspect="1"/>
           </p:cNvSpPr>
           <p:nvPr>
             <p:ph type="sldImg" idx="2"/>
@@ -643,7 +661,7 @@
             <a:spLocks noGrp="1"/>
           </p:cNvSpPr>
           <p:nvPr>
-            <p:ph type="body" idx="3" sz="quarter"/>
+            <p:ph type="body" sz="quarter" idx="3"/>
           </p:nvPr>
         </p:nvSpPr>
         <p:spPr/>
@@ -664,7 +682,7 @@
             <a:spLocks noGrp="1"/>
           </p:cNvSpPr>
           <p:nvPr>
-            <p:ph type="sldNum" idx="5" sz="quarter"/>
+            <p:ph type="sldNum" sz="quarter" idx="5"/>
           </p:nvPr>
         </p:nvSpPr>
         <p:spPr/>
@@ -678,7 +696,7 @@
 </file>
 
 <file path=ppt/notesSlides/notesSlide3.xml><?xml version="1.0" encoding="utf-8"?>
-<p:notes xmlns:a="http://schemas.openxmlformats.org/drawingml/2006/main" xmlns:p="http://schemas.openxmlformats.org/presentationml/2006/main" xmlns:r="http://schemas.openxmlformats.org/officeDocument/2006/relationships">
+<p:notes xmlns:a="http://schemas.openxmlformats.org/drawingml/2006/main" xmlns:r="http://schemas.openxmlformats.org/officeDocument/2006/relationships" xmlns:p="http://schemas.openxmlformats.org/presentationml/2006/main">
   <p:cSld>
     <p:spTree>
       <p:nvGrpSpPr>
@@ -698,7 +716,7 @@
         <p:nvSpPr>
           <p:cNvPr id="2" name="Slide Image Placeholder 1"/>
           <p:cNvSpPr>
-            <a:spLocks noGrp="1"/>
+            <a:spLocks noGrp="1" noRot="1" noChangeAspect="1"/>
           </p:cNvSpPr>
           <p:nvPr>
             <p:ph type="sldImg" idx="2"/>
@@ -713,7 +731,7 @@
             <a:spLocks noGrp="1"/>
           </p:cNvSpPr>
           <p:nvPr>
-            <p:ph type="body" idx="3" sz="quarter"/>
+            <p:ph type="body" sz="quarter" idx="3"/>
           </p:nvPr>
         </p:nvSpPr>
         <p:spPr/>
@@ -734,7 +752,7 @@
             <a:spLocks noGrp="1"/>
           </p:cNvSpPr>
           <p:nvPr>
-            <p:ph type="sldNum" idx="5" sz="quarter"/>
+            <p:ph type="sldNum" sz="quarter" idx="5"/>
           </p:nvPr>
         </p:nvSpPr>
         <p:spPr/>
@@ -748,7 +766,7 @@
 </file>
 
 <file path=ppt/notesSlides/notesSlide4.xml><?xml version="1.0" encoding="utf-8"?>
-<p:notes xmlns:a="http://schemas.openxmlformats.org/drawingml/2006/main" xmlns:p="http://schemas.openxmlformats.org/presentationml/2006/main" xmlns:r="http://schemas.openxmlformats.org/officeDocument/2006/relationships">
+<p:notes xmlns:a="http://schemas.openxmlformats.org/drawingml/2006/main" xmlns:r="http://schemas.openxmlformats.org/officeDocument/2006/relationships" xmlns:p="http://schemas.openxmlformats.org/presentationml/2006/main">
   <p:cSld>
     <p:spTree>
       <p:nvGrpSpPr>
@@ -768,7 +786,7 @@
         <p:nvSpPr>
           <p:cNvPr id="2" name="Slide Image Placeholder 1"/>
           <p:cNvSpPr>
-            <a:spLocks noGrp="1"/>
+            <a:spLocks noGrp="1" noRot="1" noChangeAspect="1"/>
           </p:cNvSpPr>
           <p:nvPr>
             <p:ph type="sldImg" idx="2"/>
@@ -783,7 +801,7 @@
             <a:spLocks noGrp="1"/>
           </p:cNvSpPr>
           <p:nvPr>
-            <p:ph type="body" idx="3" sz="quarter"/>
+            <p:ph type="body" sz="quarter" idx="3"/>
           </p:nvPr>
         </p:nvSpPr>
         <p:spPr/>
@@ -804,7 +822,7 @@
             <a:spLocks noGrp="1"/>
           </p:cNvSpPr>
           <p:nvPr>
-            <p:ph type="sldNum" idx="5" sz="quarter"/>
+            <p:ph type="sldNum" sz="quarter" idx="5"/>
           </p:nvPr>
         </p:nvSpPr>
         <p:spPr/>
@@ -818,7 +836,7 @@
 </file>
 
 <file path=ppt/notesSlides/notesSlide5.xml><?xml version="1.0" encoding="utf-8"?>
-<p:notes xmlns:a="http://schemas.openxmlformats.org/drawingml/2006/main" xmlns:p="http://schemas.openxmlformats.org/presentationml/2006/main" xmlns:r="http://schemas.openxmlformats.org/officeDocument/2006/relationships">
+<p:notes xmlns:a="http://schemas.openxmlformats.org/drawingml/2006/main" xmlns:r="http://schemas.openxmlformats.org/officeDocument/2006/relationships" xmlns:p="http://schemas.openxmlformats.org/presentationml/2006/main">
   <p:cSld>
     <p:spTree>
       <p:nvGrpSpPr>
@@ -838,7 +856,7 @@
         <p:nvSpPr>
           <p:cNvPr id="2" name="Slide Image Placeholder 1"/>
           <p:cNvSpPr>
-            <a:spLocks noGrp="1"/>
+            <a:spLocks noGrp="1" noRot="1" noChangeAspect="1"/>
           </p:cNvSpPr>
           <p:nvPr>
             <p:ph type="sldImg" idx="2"/>
@@ -853,7 +871,7 @@
             <a:spLocks noGrp="1"/>
           </p:cNvSpPr>
           <p:nvPr>
-            <p:ph type="body" idx="3" sz="quarter"/>
+            <p:ph type="body" sz="quarter" idx="3"/>
           </p:nvPr>
         </p:nvSpPr>
         <p:spPr/>
@@ -874,7 +892,7 @@
             <a:spLocks noGrp="1"/>
           </p:cNvSpPr>
           <p:nvPr>
-            <p:ph type="sldNum" idx="5" sz="quarter"/>
+            <p:ph type="sldNum" sz="quarter" idx="5"/>
           </p:nvPr>
         </p:nvSpPr>
         <p:spPr/>
@@ -888,7 +906,7 @@
 </file>
 
 <file path=ppt/notesSlides/notesSlide6.xml><?xml version="1.0" encoding="utf-8"?>
-<p:notes xmlns:a="http://schemas.openxmlformats.org/drawingml/2006/main" xmlns:p="http://schemas.openxmlformats.org/presentationml/2006/main" xmlns:r="http://schemas.openxmlformats.org/officeDocument/2006/relationships">
+<p:notes xmlns:a="http://schemas.openxmlformats.org/drawingml/2006/main" xmlns:r="http://schemas.openxmlformats.org/officeDocument/2006/relationships" xmlns:p="http://schemas.openxmlformats.org/presentationml/2006/main">
   <p:cSld>
     <p:spTree>
       <p:nvGrpSpPr>
@@ -908,7 +926,7 @@
         <p:nvSpPr>
           <p:cNvPr id="2" name="Slide Image Placeholder 1"/>
           <p:cNvSpPr>
-            <a:spLocks noGrp="1"/>
+            <a:spLocks noGrp="1" noRot="1" noChangeAspect="1"/>
           </p:cNvSpPr>
           <p:nvPr>
             <p:ph type="sldImg" idx="2"/>
@@ -923,7 +941,7 @@
             <a:spLocks noGrp="1"/>
           </p:cNvSpPr>
           <p:nvPr>
-            <p:ph type="body" idx="3" sz="quarter"/>
+            <p:ph type="body" sz="quarter" idx="3"/>
           </p:nvPr>
         </p:nvSpPr>
         <p:spPr/>
@@ -944,7 +962,7 @@
             <a:spLocks noGrp="1"/>
           </p:cNvSpPr>
           <p:nvPr>
-            <p:ph type="sldNum" idx="5" sz="quarter"/>
+            <p:ph type="sldNum" sz="quarter" idx="5"/>
           </p:nvPr>
         </p:nvSpPr>
         <p:spPr/>
@@ -958,7 +976,7 @@
 </file>
 
 <file path=ppt/notesSlides/notesSlide7.xml><?xml version="1.0" encoding="utf-8"?>
-<p:notes xmlns:a="http://schemas.openxmlformats.org/drawingml/2006/main" xmlns:p="http://schemas.openxmlformats.org/presentationml/2006/main" xmlns:r="http://schemas.openxmlformats.org/officeDocument/2006/relationships">
+<p:notes xmlns:a="http://schemas.openxmlformats.org/drawingml/2006/main" xmlns:r="http://schemas.openxmlformats.org/officeDocument/2006/relationships" xmlns:p="http://schemas.openxmlformats.org/presentationml/2006/main">
   <p:cSld>
     <p:spTree>
       <p:nvGrpSpPr>
@@ -978,7 +996,7 @@
         <p:nvSpPr>
           <p:cNvPr id="2" name="Slide Image Placeholder 1"/>
           <p:cNvSpPr>
-            <a:spLocks noGrp="1"/>
+            <a:spLocks noGrp="1" noRot="1" noChangeAspect="1"/>
           </p:cNvSpPr>
           <p:nvPr>
             <p:ph type="sldImg" idx="2"/>
@@ -993,7 +1011,7 @@
             <a:spLocks noGrp="1"/>
           </p:cNvSpPr>
           <p:nvPr>
-            <p:ph type="body" idx="3" sz="quarter"/>
+            <p:ph type="body" sz="quarter" idx="3"/>
           </p:nvPr>
         </p:nvSpPr>
         <p:spPr/>
@@ -1014,7 +1032,7 @@
             <a:spLocks noGrp="1"/>
           </p:cNvSpPr>
           <p:nvPr>
-            <p:ph type="sldNum" idx="5" sz="quarter"/>
+            <p:ph type="sldNum" sz="quarter" idx="5"/>
           </p:nvPr>
         </p:nvSpPr>
         <p:spPr/>
@@ -1028,7 +1046,7 @@
 </file>
 
 <file path=ppt/notesSlides/notesSlide8.xml><?xml version="1.0" encoding="utf-8"?>
-<p:notes xmlns:a="http://schemas.openxmlformats.org/drawingml/2006/main" xmlns:p="http://schemas.openxmlformats.org/presentationml/2006/main" xmlns:r="http://schemas.openxmlformats.org/officeDocument/2006/relationships">
+<p:notes xmlns:a="http://schemas.openxmlformats.org/drawingml/2006/main" xmlns:r="http://schemas.openxmlformats.org/officeDocument/2006/relationships" xmlns:p="http://schemas.openxmlformats.org/presentationml/2006/main">
   <p:cSld>
     <p:spTree>
       <p:nvGrpSpPr>
@@ -1048,7 +1066,7 @@
         <p:nvSpPr>
           <p:cNvPr id="2" name="Slide Image Placeholder 1"/>
           <p:cNvSpPr>
-            <a:spLocks noGrp="1"/>
+            <a:spLocks noGrp="1" noRot="1" noChangeAspect="1"/>
           </p:cNvSpPr>
           <p:nvPr>
             <p:ph type="sldImg" idx="2"/>
@@ -1063,7 +1081,7 @@
             <a:spLocks noGrp="1"/>
           </p:cNvSpPr>
           <p:nvPr>
-            <p:ph type="body" idx="3" sz="quarter"/>
+            <p:ph type="body" sz="quarter" idx="3"/>
           </p:nvPr>
         </p:nvSpPr>
         <p:spPr/>
@@ -1084,7 +1102,7 @@
             <a:spLocks noGrp="1"/>
           </p:cNvSpPr>
           <p:nvPr>
-            <p:ph type="sldNum" idx="5" sz="quarter"/>
+            <p:ph type="sldNum" sz="quarter" idx="5"/>
           </p:nvPr>
         </p:nvSpPr>
         <p:spPr/>
@@ -1098,7 +1116,7 @@
 </file>
 
 <file path=ppt/notesSlides/notesSlide9.xml><?xml version="1.0" encoding="utf-8"?>
-<p:notes xmlns:a="http://schemas.openxmlformats.org/drawingml/2006/main" xmlns:p="http://schemas.openxmlformats.org/presentationml/2006/main" xmlns:r="http://schemas.openxmlformats.org/officeDocument/2006/relationships">
+<p:notes xmlns:a="http://schemas.openxmlformats.org/drawingml/2006/main" xmlns:r="http://schemas.openxmlformats.org/officeDocument/2006/relationships" xmlns:p="http://schemas.openxmlformats.org/presentationml/2006/main">
   <p:cSld>
     <p:spTree>
       <p:nvGrpSpPr>
@@ -1118,7 +1136,7 @@
         <p:nvSpPr>
           <p:cNvPr id="2" name="Slide Image Placeholder 1"/>
           <p:cNvSpPr>
-            <a:spLocks noGrp="1"/>
+            <a:spLocks noGrp="1" noRot="1" noChangeAspect="1"/>
           </p:cNvSpPr>
           <p:nvPr>
             <p:ph type="sldImg" idx="2"/>
@@ -1133,7 +1151,7 @@
             <a:spLocks noGrp="1"/>
           </p:cNvSpPr>
           <p:nvPr>
-            <p:ph type="body" idx="3" sz="quarter"/>
+            <p:ph type="body" sz="quarter" idx="3"/>
           </p:nvPr>
         </p:nvSpPr>
         <p:spPr/>
@@ -1154,7 +1172,7 @@
             <a:spLocks noGrp="1"/>
           </p:cNvSpPr>
           <p:nvPr>
-            <p:ph type="sldNum" idx="5" sz="quarter"/>
+            <p:ph type="sldNum" sz="quarter" idx="5"/>
           </p:nvPr>
         </p:nvSpPr>
         <p:spPr/>
@@ -1205,10 +1223,9 @@
           <a:lstStyle/>
           <a:p>
             <a:r>
-              <a:rPr lang="en-US" smtClean="0"/>
+              <a:rPr lang="en-US"/>
               <a:t>Click to edit Master title style</a:t>
             </a:r>
-            <a:endParaRPr lang="en-US"/>
           </a:p>
         </p:txBody>
       </p:sp>
@@ -1324,10 +1341,9 @@
           </a:lstStyle>
           <a:p>
             <a:r>
-              <a:rPr lang="en-US" smtClean="0"/>
+              <a:rPr lang="en-US"/>
               <a:t>Click to edit Master subtitle style</a:t>
             </a:r>
-            <a:endParaRPr lang="en-US"/>
           </a:p>
         </p:txBody>
       </p:sp>
@@ -1348,7 +1364,7 @@
           <a:p>
             <a:fld id="{5BCAD085-E8A6-8845-BD4E-CB4CCA059FC4}" type="datetimeFigureOut">
               <a:rPr lang="en-US" smtClean="0"/>
-              <a:t>1/27/13</a:t>
+              <a:t>7/30/2026</a:t>
             </a:fld>
             <a:endParaRPr lang="en-US"/>
           </a:p>
@@ -1442,10 +1458,9 @@
           <a:lstStyle/>
           <a:p>
             <a:r>
-              <a:rPr lang="en-US" smtClean="0"/>
+              <a:rPr lang="en-US"/>
               <a:t>Click to edit Master title style</a:t>
             </a:r>
-            <a:endParaRPr lang="en-US"/>
           </a:p>
         </p:txBody>
       </p:sp>
@@ -1466,38 +1481,37 @@
           <a:p>
             <a:pPr lvl="0"/>
             <a:r>
-              <a:rPr lang="en-US" smtClean="0"/>
+              <a:rPr lang="en-US"/>
               <a:t>Click to edit Master text styles</a:t>
             </a:r>
           </a:p>
           <a:p>
             <a:pPr lvl="1"/>
             <a:r>
-              <a:rPr lang="en-US" smtClean="0"/>
+              <a:rPr lang="en-US"/>
               <a:t>Second level</a:t>
             </a:r>
           </a:p>
           <a:p>
             <a:pPr lvl="2"/>
             <a:r>
-              <a:rPr lang="en-US" smtClean="0"/>
+              <a:rPr lang="en-US"/>
               <a:t>Third level</a:t>
             </a:r>
           </a:p>
           <a:p>
             <a:pPr lvl="3"/>
             <a:r>
-              <a:rPr lang="en-US" smtClean="0"/>
+              <a:rPr lang="en-US"/>
               <a:t>Fourth level</a:t>
             </a:r>
           </a:p>
           <a:p>
             <a:pPr lvl="4"/>
             <a:r>
-              <a:rPr lang="en-US" smtClean="0"/>
+              <a:rPr lang="en-US"/>
               <a:t>Fifth level</a:t>
             </a:r>
-            <a:endParaRPr lang="en-US"/>
           </a:p>
         </p:txBody>
       </p:sp>
@@ -1518,7 +1532,7 @@
           <a:p>
             <a:fld id="{5BCAD085-E8A6-8845-BD4E-CB4CCA059FC4}" type="datetimeFigureOut">
               <a:rPr lang="en-US" smtClean="0"/>
-              <a:t>1/27/13</a:t>
+              <a:t>7/30/2026</a:t>
             </a:fld>
             <a:endParaRPr lang="en-US"/>
           </a:p>
@@ -1617,10 +1631,9 @@
           <a:lstStyle/>
           <a:p>
             <a:r>
-              <a:rPr lang="en-US" smtClean="0"/>
+              <a:rPr lang="en-US"/>
               <a:t>Click to edit Master title style</a:t>
             </a:r>
-            <a:endParaRPr lang="en-US"/>
           </a:p>
         </p:txBody>
       </p:sp>
@@ -1646,38 +1659,37 @@
           <a:p>
             <a:pPr lvl="0"/>
             <a:r>
-              <a:rPr lang="en-US" smtClean="0"/>
+              <a:rPr lang="en-US"/>
               <a:t>Click to edit Master text styles</a:t>
             </a:r>
           </a:p>
           <a:p>
             <a:pPr lvl="1"/>
             <a:r>
-              <a:rPr lang="en-US" smtClean="0"/>
+              <a:rPr lang="en-US"/>
               <a:t>Second level</a:t>
             </a:r>
           </a:p>
           <a:p>
             <a:pPr lvl="2"/>
             <a:r>
-              <a:rPr lang="en-US" smtClean="0"/>
+              <a:rPr lang="en-US"/>
               <a:t>Third level</a:t>
             </a:r>
           </a:p>
           <a:p>
             <a:pPr lvl="3"/>
             <a:r>
-              <a:rPr lang="en-US" smtClean="0"/>
+              <a:rPr lang="en-US"/>
               <a:t>Fourth level</a:t>
             </a:r>
           </a:p>
           <a:p>
             <a:pPr lvl="4"/>
             <a:r>
-              <a:rPr lang="en-US" smtClean="0"/>
+              <a:rPr lang="en-US"/>
               <a:t>Fifth level</a:t>
             </a:r>
-            <a:endParaRPr lang="en-US"/>
           </a:p>
         </p:txBody>
       </p:sp>
@@ -1698,7 +1710,7 @@
           <a:p>
             <a:fld id="{5BCAD085-E8A6-8845-BD4E-CB4CCA059FC4}" type="datetimeFigureOut">
               <a:rPr lang="en-US" smtClean="0"/>
-              <a:t>1/27/13</a:t>
+              <a:t>7/30/2026</a:t>
             </a:fld>
             <a:endParaRPr lang="en-US"/>
           </a:p>
@@ -1792,10 +1804,9 @@
           <a:lstStyle/>
           <a:p>
             <a:r>
-              <a:rPr lang="en-US" smtClean="0"/>
+              <a:rPr lang="en-US"/>
               <a:t>Click to edit Master title style</a:t>
             </a:r>
-            <a:endParaRPr lang="en-US"/>
           </a:p>
         </p:txBody>
       </p:sp>
@@ -1816,38 +1827,37 @@
           <a:p>
             <a:pPr lvl="0"/>
             <a:r>
-              <a:rPr lang="en-US" smtClean="0"/>
+              <a:rPr lang="en-US"/>
               <a:t>Click to edit Master text styles</a:t>
             </a:r>
           </a:p>
           <a:p>
             <a:pPr lvl="1"/>
             <a:r>
-              <a:rPr lang="en-US" smtClean="0"/>
+              <a:rPr lang="en-US"/>
               <a:t>Second level</a:t>
             </a:r>
           </a:p>
           <a:p>
             <a:pPr lvl="2"/>
             <a:r>
-              <a:rPr lang="en-US" smtClean="0"/>
+              <a:rPr lang="en-US"/>
               <a:t>Third level</a:t>
             </a:r>
           </a:p>
           <a:p>
             <a:pPr lvl="3"/>
             <a:r>
-              <a:rPr lang="en-US" smtClean="0"/>
+              <a:rPr lang="en-US"/>
               <a:t>Fourth level</a:t>
             </a:r>
           </a:p>
           <a:p>
             <a:pPr lvl="4"/>
             <a:r>
-              <a:rPr lang="en-US" smtClean="0"/>
+              <a:rPr lang="en-US"/>
               <a:t>Fifth level</a:t>
             </a:r>
-            <a:endParaRPr lang="en-US"/>
           </a:p>
         </p:txBody>
       </p:sp>
@@ -1868,7 +1878,7 @@
           <a:p>
             <a:fld id="{5BCAD085-E8A6-8845-BD4E-CB4CCA059FC4}" type="datetimeFigureOut">
               <a:rPr lang="en-US" smtClean="0"/>
-              <a:t>1/27/13</a:t>
+              <a:t>7/30/2026</a:t>
             </a:fld>
             <a:endParaRPr lang="en-US"/>
           </a:p>
@@ -1971,10 +1981,9 @@
           </a:lstStyle>
           <a:p>
             <a:r>
-              <a:rPr lang="en-US" smtClean="0"/>
+              <a:rPr lang="en-US"/>
               <a:t>Click to edit Master title style</a:t>
             </a:r>
-            <a:endParaRPr lang="en-US"/>
           </a:p>
         </p:txBody>
       </p:sp>
@@ -2091,7 +2100,7 @@
           <a:p>
             <a:pPr lvl="0"/>
             <a:r>
-              <a:rPr lang="en-US" smtClean="0"/>
+              <a:rPr lang="en-US"/>
               <a:t>Click to edit Master text styles</a:t>
             </a:r>
           </a:p>
@@ -2114,7 +2123,7 @@
           <a:p>
             <a:fld id="{5BCAD085-E8A6-8845-BD4E-CB4CCA059FC4}" type="datetimeFigureOut">
               <a:rPr lang="en-US" smtClean="0"/>
-              <a:t>1/27/13</a:t>
+              <a:t>7/30/2026</a:t>
             </a:fld>
             <a:endParaRPr lang="en-US"/>
           </a:p>
@@ -2208,10 +2217,9 @@
           <a:lstStyle/>
           <a:p>
             <a:r>
-              <a:rPr lang="en-US" smtClean="0"/>
+              <a:rPr lang="en-US"/>
               <a:t>Click to edit Master title style</a:t>
             </a:r>
-            <a:endParaRPr lang="en-US"/>
           </a:p>
         </p:txBody>
       </p:sp>
@@ -2265,38 +2273,37 @@
           <a:p>
             <a:pPr lvl="0"/>
             <a:r>
-              <a:rPr lang="en-US" smtClean="0"/>
+              <a:rPr lang="en-US"/>
               <a:t>Click to edit Master text styles</a:t>
             </a:r>
           </a:p>
           <a:p>
             <a:pPr lvl="1"/>
             <a:r>
-              <a:rPr lang="en-US" smtClean="0"/>
+              <a:rPr lang="en-US"/>
               <a:t>Second level</a:t>
             </a:r>
           </a:p>
           <a:p>
             <a:pPr lvl="2"/>
             <a:r>
-              <a:rPr lang="en-US" smtClean="0"/>
+              <a:rPr lang="en-US"/>
               <a:t>Third level</a:t>
             </a:r>
           </a:p>
           <a:p>
             <a:pPr lvl="3"/>
             <a:r>
-              <a:rPr lang="en-US" smtClean="0"/>
+              <a:rPr lang="en-US"/>
               <a:t>Fourth level</a:t>
             </a:r>
           </a:p>
           <a:p>
             <a:pPr lvl="4"/>
             <a:r>
-              <a:rPr lang="en-US" smtClean="0"/>
+              <a:rPr lang="en-US"/>
               <a:t>Fifth level</a:t>
             </a:r>
-            <a:endParaRPr lang="en-US"/>
           </a:p>
         </p:txBody>
       </p:sp>
@@ -2350,38 +2357,37 @@
           <a:p>
             <a:pPr lvl="0"/>
             <a:r>
-              <a:rPr lang="en-US" smtClean="0"/>
+              <a:rPr lang="en-US"/>
               <a:t>Click to edit Master text styles</a:t>
             </a:r>
           </a:p>
           <a:p>
             <a:pPr lvl="1"/>
             <a:r>
-              <a:rPr lang="en-US" smtClean="0"/>
+              <a:rPr lang="en-US"/>
               <a:t>Second level</a:t>
             </a:r>
           </a:p>
           <a:p>
             <a:pPr lvl="2"/>
             <a:r>
-              <a:rPr lang="en-US" smtClean="0"/>
+              <a:rPr lang="en-US"/>
               <a:t>Third level</a:t>
             </a:r>
           </a:p>
           <a:p>
             <a:pPr lvl="3"/>
             <a:r>
-              <a:rPr lang="en-US" smtClean="0"/>
+              <a:rPr lang="en-US"/>
               <a:t>Fourth level</a:t>
             </a:r>
           </a:p>
           <a:p>
             <a:pPr lvl="4"/>
             <a:r>
-              <a:rPr lang="en-US" smtClean="0"/>
+              <a:rPr lang="en-US"/>
               <a:t>Fifth level</a:t>
             </a:r>
-            <a:endParaRPr lang="en-US"/>
           </a:p>
         </p:txBody>
       </p:sp>
@@ -2402,7 +2408,7 @@
           <a:p>
             <a:fld id="{5BCAD085-E8A6-8845-BD4E-CB4CCA059FC4}" type="datetimeFigureOut">
               <a:rPr lang="en-US" smtClean="0"/>
-              <a:t>1/27/13</a:t>
+              <a:t>7/30/2026</a:t>
             </a:fld>
             <a:endParaRPr lang="en-US"/>
           </a:p>
@@ -2500,10 +2506,9 @@
           </a:lstStyle>
           <a:p>
             <a:r>
-              <a:rPr lang="en-US" smtClean="0"/>
+              <a:rPr lang="en-US"/>
               <a:t>Click to edit Master title style</a:t>
             </a:r>
-            <a:endParaRPr lang="en-US"/>
           </a:p>
         </p:txBody>
       </p:sp>
@@ -2566,7 +2571,7 @@
           <a:p>
             <a:pPr lvl="0"/>
             <a:r>
-              <a:rPr lang="en-US" smtClean="0"/>
+              <a:rPr lang="en-US"/>
               <a:t>Click to edit Master text styles</a:t>
             </a:r>
           </a:p>
@@ -2622,38 +2627,37 @@
           <a:p>
             <a:pPr lvl="0"/>
             <a:r>
-              <a:rPr lang="en-US" smtClean="0"/>
+              <a:rPr lang="en-US"/>
               <a:t>Click to edit Master text styles</a:t>
             </a:r>
           </a:p>
           <a:p>
             <a:pPr lvl="1"/>
             <a:r>
-              <a:rPr lang="en-US" smtClean="0"/>
+              <a:rPr lang="en-US"/>
               <a:t>Second level</a:t>
             </a:r>
           </a:p>
           <a:p>
             <a:pPr lvl="2"/>
             <a:r>
-              <a:rPr lang="en-US" smtClean="0"/>
+              <a:rPr lang="en-US"/>
               <a:t>Third level</a:t>
             </a:r>
           </a:p>
           <a:p>
             <a:pPr lvl="3"/>
             <a:r>
-              <a:rPr lang="en-US" smtClean="0"/>
+              <a:rPr lang="en-US"/>
               <a:t>Fourth level</a:t>
             </a:r>
           </a:p>
           <a:p>
             <a:pPr lvl="4"/>
             <a:r>
-              <a:rPr lang="en-US" smtClean="0"/>
+              <a:rPr lang="en-US"/>
               <a:t>Fifth level</a:t>
             </a:r>
-            <a:endParaRPr lang="en-US"/>
           </a:p>
         </p:txBody>
       </p:sp>
@@ -2716,7 +2720,7 @@
           <a:p>
             <a:pPr lvl="0"/>
             <a:r>
-              <a:rPr lang="en-US" smtClean="0"/>
+              <a:rPr lang="en-US"/>
               <a:t>Click to edit Master text styles</a:t>
             </a:r>
           </a:p>
@@ -2772,38 +2776,37 @@
           <a:p>
             <a:pPr lvl="0"/>
             <a:r>
-              <a:rPr lang="en-US" smtClean="0"/>
+              <a:rPr lang="en-US"/>
               <a:t>Click to edit Master text styles</a:t>
             </a:r>
           </a:p>
           <a:p>
             <a:pPr lvl="1"/>
             <a:r>
-              <a:rPr lang="en-US" smtClean="0"/>
+              <a:rPr lang="en-US"/>
               <a:t>Second level</a:t>
             </a:r>
           </a:p>
           <a:p>
             <a:pPr lvl="2"/>
             <a:r>
-              <a:rPr lang="en-US" smtClean="0"/>
+              <a:rPr lang="en-US"/>
               <a:t>Third level</a:t>
             </a:r>
           </a:p>
           <a:p>
             <a:pPr lvl="3"/>
             <a:r>
-              <a:rPr lang="en-US" smtClean="0"/>
+              <a:rPr lang="en-US"/>
               <a:t>Fourth level</a:t>
             </a:r>
           </a:p>
           <a:p>
             <a:pPr lvl="4"/>
             <a:r>
-              <a:rPr lang="en-US" smtClean="0"/>
+              <a:rPr lang="en-US"/>
               <a:t>Fifth level</a:t>
             </a:r>
-            <a:endParaRPr lang="en-US"/>
           </a:p>
         </p:txBody>
       </p:sp>
@@ -2824,7 +2827,7 @@
           <a:p>
             <a:fld id="{5BCAD085-E8A6-8845-BD4E-CB4CCA059FC4}" type="datetimeFigureOut">
               <a:rPr lang="en-US" smtClean="0"/>
-              <a:t>1/27/13</a:t>
+              <a:t>7/30/2026</a:t>
             </a:fld>
             <a:endParaRPr lang="en-US"/>
           </a:p>
@@ -2918,10 +2921,9 @@
           <a:lstStyle/>
           <a:p>
             <a:r>
-              <a:rPr lang="en-US" smtClean="0"/>
+              <a:rPr lang="en-US"/>
               <a:t>Click to edit Master title style</a:t>
             </a:r>
-            <a:endParaRPr lang="en-US"/>
           </a:p>
         </p:txBody>
       </p:sp>
@@ -2942,7 +2944,7 @@
           <a:p>
             <a:fld id="{5BCAD085-E8A6-8845-BD4E-CB4CCA059FC4}" type="datetimeFigureOut">
               <a:rPr lang="en-US" smtClean="0"/>
-              <a:t>1/27/13</a:t>
+              <a:t>7/30/2026</a:t>
             </a:fld>
             <a:endParaRPr lang="en-US"/>
           </a:p>
@@ -3037,7 +3039,7 @@
           <a:p>
             <a:fld id="{5BCAD085-E8A6-8845-BD4E-CB4CCA059FC4}" type="datetimeFigureOut">
               <a:rPr lang="en-US" smtClean="0"/>
-              <a:t>1/27/13</a:t>
+              <a:t>7/30/2026</a:t>
             </a:fld>
             <a:endParaRPr lang="en-US"/>
           </a:p>
@@ -3140,10 +3142,9 @@
           </a:lstStyle>
           <a:p>
             <a:r>
-              <a:rPr lang="en-US" smtClean="0"/>
+              <a:rPr lang="en-US"/>
               <a:t>Click to edit Master title style</a:t>
             </a:r>
-            <a:endParaRPr lang="en-US"/>
           </a:p>
         </p:txBody>
       </p:sp>
@@ -3197,38 +3198,37 @@
           <a:p>
             <a:pPr lvl="0"/>
             <a:r>
-              <a:rPr lang="en-US" smtClean="0"/>
+              <a:rPr lang="en-US"/>
               <a:t>Click to edit Master text styles</a:t>
             </a:r>
           </a:p>
           <a:p>
             <a:pPr lvl="1"/>
             <a:r>
-              <a:rPr lang="en-US" smtClean="0"/>
+              <a:rPr lang="en-US"/>
               <a:t>Second level</a:t>
             </a:r>
           </a:p>
           <a:p>
             <a:pPr lvl="2"/>
             <a:r>
-              <a:rPr lang="en-US" smtClean="0"/>
+              <a:rPr lang="en-US"/>
               <a:t>Third level</a:t>
             </a:r>
           </a:p>
           <a:p>
             <a:pPr lvl="3"/>
             <a:r>
-              <a:rPr lang="en-US" smtClean="0"/>
+              <a:rPr lang="en-US"/>
               <a:t>Fourth level</a:t>
             </a:r>
           </a:p>
           <a:p>
             <a:pPr lvl="4"/>
             <a:r>
-              <a:rPr lang="en-US" smtClean="0"/>
+              <a:rPr lang="en-US"/>
               <a:t>Fifth level</a:t>
             </a:r>
-            <a:endParaRPr lang="en-US"/>
           </a:p>
         </p:txBody>
       </p:sp>
@@ -3291,7 +3291,7 @@
           <a:p>
             <a:pPr lvl="0"/>
             <a:r>
-              <a:rPr lang="en-US" smtClean="0"/>
+              <a:rPr lang="en-US"/>
               <a:t>Click to edit Master text styles</a:t>
             </a:r>
           </a:p>
@@ -3314,7 +3314,7 @@
           <a:p>
             <a:fld id="{5BCAD085-E8A6-8845-BD4E-CB4CCA059FC4}" type="datetimeFigureOut">
               <a:rPr lang="en-US" smtClean="0"/>
-              <a:t>1/27/13</a:t>
+              <a:t>7/30/2026</a:t>
             </a:fld>
             <a:endParaRPr lang="en-US"/>
           </a:p>
@@ -3417,10 +3417,9 @@
           </a:lstStyle>
           <a:p>
             <a:r>
-              <a:rPr lang="en-US" smtClean="0"/>
+              <a:rPr lang="en-US"/>
               <a:t>Click to edit Master title style</a:t>
             </a:r>
-            <a:endParaRPr lang="en-US"/>
           </a:p>
         </p:txBody>
       </p:sp>
@@ -3544,7 +3543,7 @@
           <a:p>
             <a:pPr lvl="0"/>
             <a:r>
-              <a:rPr lang="en-US" smtClean="0"/>
+              <a:rPr lang="en-US"/>
               <a:t>Click to edit Master text styles</a:t>
             </a:r>
           </a:p>
@@ -3567,7 +3566,7 @@
           <a:p>
             <a:fld id="{5BCAD085-E8A6-8845-BD4E-CB4CCA059FC4}" type="datetimeFigureOut">
               <a:rPr lang="en-US" smtClean="0"/>
-              <a:t>1/27/13</a:t>
+              <a:t>7/30/2026</a:t>
             </a:fld>
             <a:endParaRPr lang="en-US"/>
           </a:p>
@@ -3676,10 +3675,9 @@
           <a:lstStyle/>
           <a:p>
             <a:r>
-              <a:rPr lang="en-US" smtClean="0"/>
+              <a:rPr lang="en-US"/>
               <a:t>Click to edit Master title style</a:t>
             </a:r>
-            <a:endParaRPr lang="en-US"/>
           </a:p>
         </p:txBody>
       </p:sp>
@@ -3710,38 +3708,37 @@
           <a:p>
             <a:pPr lvl="0"/>
             <a:r>
-              <a:rPr lang="en-US" smtClean="0"/>
+              <a:rPr lang="en-US"/>
               <a:t>Click to edit Master text styles</a:t>
             </a:r>
           </a:p>
           <a:p>
             <a:pPr lvl="1"/>
             <a:r>
-              <a:rPr lang="en-US" smtClean="0"/>
+              <a:rPr lang="en-US"/>
               <a:t>Second level</a:t>
             </a:r>
           </a:p>
           <a:p>
             <a:pPr lvl="2"/>
             <a:r>
-              <a:rPr lang="en-US" smtClean="0"/>
+              <a:rPr lang="en-US"/>
               <a:t>Third level</a:t>
             </a:r>
           </a:p>
           <a:p>
             <a:pPr lvl="3"/>
             <a:r>
-              <a:rPr lang="en-US" smtClean="0"/>
+              <a:rPr lang="en-US"/>
               <a:t>Fourth level</a:t>
             </a:r>
           </a:p>
           <a:p>
             <a:pPr lvl="4"/>
             <a:r>
-              <a:rPr lang="en-US" smtClean="0"/>
+              <a:rPr lang="en-US"/>
               <a:t>Fifth level</a:t>
             </a:r>
-            <a:endParaRPr lang="en-US"/>
           </a:p>
         </p:txBody>
       </p:sp>
@@ -3780,7 +3777,7 @@
           <a:p>
             <a:fld id="{5BCAD085-E8A6-8845-BD4E-CB4CCA059FC4}" type="datetimeFigureOut">
               <a:rPr lang="en-US" smtClean="0"/>
-              <a:t>1/27/13</a:t>
+              <a:t>7/30/2026</a:t>
             </a:fld>
             <a:endParaRPr lang="en-US"/>
           </a:p>
@@ -4139,7 +4136,7 @@
 </file>
 
 <file path=ppt/slides/slide1.xml><?xml version="1.0" encoding="utf-8"?>
-<p:sld xmlns:a="http://schemas.openxmlformats.org/drawingml/2006/main" xmlns:p="http://schemas.openxmlformats.org/presentationml/2006/main" xmlns:r="http://schemas.openxmlformats.org/officeDocument/2006/relationships">
+<p:sld xmlns:a="http://schemas.openxmlformats.org/drawingml/2006/main" xmlns:r="http://schemas.openxmlformats.org/officeDocument/2006/relationships" xmlns:p="http://schemas.openxmlformats.org/presentationml/2006/main">
   <p:cSld>
     <p:spTree>
       <p:nvGrpSpPr>
@@ -4147,7 +4144,14 @@
         <p:cNvGrpSpPr/>
         <p:nvPr/>
       </p:nvGrpSpPr>
-      <p:grpSpPr/>
+      <p:grpSpPr>
+        <a:xfrm>
+          <a:off x="0" y="0"/>
+          <a:ext cx="0" cy="0"/>
+          <a:chOff x="0" y="0"/>
+          <a:chExt cx="0" cy="0"/>
+        </a:xfrm>
+      </p:grpSpPr>
       <p:sp>
         <p:nvSpPr>
           <p:cNvPr id="2" name="Rectangle 1"/>
@@ -4185,10 +4189,11 @@
           </a:fontRef>
         </p:style>
         <p:txBody>
-          <a:bodyPr rtlCol="0" anchor="ctr" wrap="square"/>
+          <a:bodyPr wrap="square" rtlCol="0" anchor="ctr"/>
           <a:lstStyle/>
           <a:p>
             <a:pPr algn="ctr"/>
+            <a:endParaRPr/>
           </a:p>
         </p:txBody>
       </p:sp>
@@ -4229,10 +4234,11 @@
           </a:fontRef>
         </p:style>
         <p:txBody>
-          <a:bodyPr rtlCol="0" anchor="ctr" wrap="square"/>
+          <a:bodyPr wrap="square" rtlCol="0" anchor="ctr"/>
           <a:lstStyle/>
           <a:p>
             <a:pPr algn="ctr"/>
+            <a:endParaRPr/>
           </a:p>
         </p:txBody>
       </p:sp>
@@ -4253,7 +4259,7 @@
           <a:noFill/>
         </p:spPr>
         <p:txBody>
-          <a:bodyPr wrap="square" lIns="0" rIns="0" tIns="0" bIns="0">
+          <a:bodyPr wrap="square" lIns="0" tIns="0" rIns="0" bIns="0">
             <a:spAutoFit/>
           </a:bodyPr>
           <a:lstStyle/>
@@ -4292,7 +4298,7 @@
           <a:noFill/>
         </p:spPr>
         <p:txBody>
-          <a:bodyPr wrap="square" lIns="0" rIns="0" tIns="0" bIns="0">
+          <a:bodyPr wrap="square" lIns="0" tIns="0" rIns="0" bIns="0">
             <a:spAutoFit/>
           </a:bodyPr>
           <a:lstStyle/>
@@ -4347,7 +4353,7 @@
           <a:noFill/>
         </p:spPr>
         <p:txBody>
-          <a:bodyPr wrap="square" lIns="0" rIns="0" tIns="0" bIns="0">
+          <a:bodyPr wrap="square" lIns="0" tIns="0" rIns="0" bIns="0">
             <a:spAutoFit/>
           </a:bodyPr>
           <a:lstStyle/>
@@ -4394,7 +4400,7 @@
 </file>
 
 <file path=ppt/slides/slide10.xml><?xml version="1.0" encoding="utf-8"?>
-<p:sld xmlns:a="http://schemas.openxmlformats.org/drawingml/2006/main" xmlns:p="http://schemas.openxmlformats.org/presentationml/2006/main" xmlns:r="http://schemas.openxmlformats.org/officeDocument/2006/relationships">
+<p:sld xmlns:a="http://schemas.openxmlformats.org/drawingml/2006/main" xmlns:r="http://schemas.openxmlformats.org/officeDocument/2006/relationships" xmlns:p="http://schemas.openxmlformats.org/presentationml/2006/main">
   <p:cSld>
     <p:spTree>
       <p:nvGrpSpPr>
@@ -4402,7 +4408,14 @@
         <p:cNvGrpSpPr/>
         <p:nvPr/>
       </p:nvGrpSpPr>
-      <p:grpSpPr/>
+      <p:grpSpPr>
+        <a:xfrm>
+          <a:off x="0" y="0"/>
+          <a:ext cx="0" cy="0"/>
+          <a:chOff x="0" y="0"/>
+          <a:chExt cx="0" cy="0"/>
+        </a:xfrm>
+      </p:grpSpPr>
       <p:sp>
         <p:nvSpPr>
           <p:cNvPr id="2" name="TextBox 1"/>
@@ -4420,7 +4433,7 @@
           <a:noFill/>
         </p:spPr>
         <p:txBody>
-          <a:bodyPr wrap="square" lIns="0" rIns="0" tIns="0" bIns="0">
+          <a:bodyPr wrap="square" lIns="0" tIns="0" rIns="0" bIns="0">
             <a:spAutoFit/>
           </a:bodyPr>
           <a:lstStyle/>
@@ -4479,10 +4492,11 @@
           </a:fontRef>
         </p:style>
         <p:txBody>
-          <a:bodyPr rtlCol="0" anchor="ctr" wrap="square"/>
+          <a:bodyPr wrap="square" rtlCol="0" anchor="ctr"/>
           <a:lstStyle/>
           <a:p>
             <a:pPr algn="ctr"/>
+            <a:endParaRPr/>
           </a:p>
         </p:txBody>
       </p:sp>
@@ -4503,7 +4517,7 @@
           <a:noFill/>
         </p:spPr>
         <p:txBody>
-          <a:bodyPr wrap="square" lIns="0" rIns="0" tIns="0" bIns="0">
+          <a:bodyPr wrap="square" lIns="0" tIns="0" rIns="0" bIns="0">
             <a:spAutoFit/>
           </a:bodyPr>
           <a:lstStyle/>
@@ -4542,7 +4556,7 @@
           <a:noFill/>
         </p:spPr>
         <p:txBody>
-          <a:bodyPr wrap="square" lIns="0" rIns="0" tIns="0" bIns="0">
+          <a:bodyPr wrap="square" lIns="0" tIns="0" rIns="0" bIns="0">
             <a:spAutoFit/>
           </a:bodyPr>
           <a:lstStyle/>
@@ -4583,8 +4597,20 @@
                 <a:tableStyleId>{5C22544A-7EE6-4342-B048-85BDC9FD1C3A}</a:tableStyleId>
               </a:tblPr>
               <a:tblGrid>
-                <a:gridCol w="8382000"/>
-                <a:gridCol w="2590800"/>
+                <a:gridCol w="8382000">
+                  <a:extLst>
+                    <a:ext uri="{9D8B030D-6E8A-4147-A177-3AD203B41FA5}">
+                      <a16:colId xmlns:a16="http://schemas.microsoft.com/office/drawing/2014/main" val="20000"/>
+                    </a:ext>
+                  </a:extLst>
+                </a:gridCol>
+                <a:gridCol w="2590800">
+                  <a:extLst>
+                    <a:ext uri="{9D8B030D-6E8A-4147-A177-3AD203B41FA5}">
+                      <a16:colId xmlns:a16="http://schemas.microsoft.com/office/drawing/2014/main" val="20001"/>
+                    </a:ext>
+                  </a:extLst>
+                </a:gridCol>
               </a:tblGrid>
               <a:tr h="438150">
                 <a:tc>
@@ -4633,6 +4659,11 @@
                     </a:solidFill>
                   </a:tcPr>
                 </a:tc>
+                <a:extLst>
+                  <a:ext uri="{0D108BD9-81ED-4DB2-BD59-A6C34878D82A}">
+                    <a16:rowId xmlns:a16="http://schemas.microsoft.com/office/drawing/2014/main" val="10000"/>
+                  </a:ext>
+                </a:extLst>
               </a:tr>
               <a:tr h="438150">
                 <a:tc>
@@ -4681,6 +4712,11 @@
                     </a:solidFill>
                   </a:tcPr>
                 </a:tc>
+                <a:extLst>
+                  <a:ext uri="{0D108BD9-81ED-4DB2-BD59-A6C34878D82A}">
+                    <a16:rowId xmlns:a16="http://schemas.microsoft.com/office/drawing/2014/main" val="10001"/>
+                  </a:ext>
+                </a:extLst>
               </a:tr>
               <a:tr h="438150">
                 <a:tc>
@@ -4729,6 +4765,11 @@
                     </a:solidFill>
                   </a:tcPr>
                 </a:tc>
+                <a:extLst>
+                  <a:ext uri="{0D108BD9-81ED-4DB2-BD59-A6C34878D82A}">
+                    <a16:rowId xmlns:a16="http://schemas.microsoft.com/office/drawing/2014/main" val="10002"/>
+                  </a:ext>
+                </a:extLst>
               </a:tr>
               <a:tr h="438150">
                 <a:tc>
@@ -4777,6 +4818,11 @@
                     </a:solidFill>
                   </a:tcPr>
                 </a:tc>
+                <a:extLst>
+                  <a:ext uri="{0D108BD9-81ED-4DB2-BD59-A6C34878D82A}">
+                    <a16:rowId xmlns:a16="http://schemas.microsoft.com/office/drawing/2014/main" val="10003"/>
+                  </a:ext>
+                </a:extLst>
               </a:tr>
               <a:tr h="438150">
                 <a:tc>
@@ -4825,6 +4871,11 @@
                     </a:solidFill>
                   </a:tcPr>
                 </a:tc>
+                <a:extLst>
+                  <a:ext uri="{0D108BD9-81ED-4DB2-BD59-A6C34878D82A}">
+                    <a16:rowId xmlns:a16="http://schemas.microsoft.com/office/drawing/2014/main" val="10004"/>
+                  </a:ext>
+                </a:extLst>
               </a:tr>
             </a:tbl>
           </a:graphicData>
@@ -4867,10 +4918,11 @@
           </a:fontRef>
         </p:style>
         <p:txBody>
-          <a:bodyPr rtlCol="0" anchor="ctr" wrap="square"/>
+          <a:bodyPr wrap="square" rtlCol="0" anchor="ctr"/>
           <a:lstStyle/>
           <a:p>
             <a:pPr algn="ctr"/>
+            <a:endParaRPr/>
           </a:p>
         </p:txBody>
       </p:sp>
@@ -4891,7 +4943,7 @@
           <a:noFill/>
         </p:spPr>
         <p:txBody>
-          <a:bodyPr wrap="square" lIns="0" rIns="0" tIns="0" bIns="0">
+          <a:bodyPr wrap="square" lIns="0" tIns="0" rIns="0" bIns="0">
             <a:spAutoFit/>
           </a:bodyPr>
           <a:lstStyle/>
@@ -4950,10 +5002,11 @@
           </a:fontRef>
         </p:style>
         <p:txBody>
-          <a:bodyPr rtlCol="0" anchor="ctr" wrap="square"/>
+          <a:bodyPr wrap="square" rtlCol="0" anchor="ctr"/>
           <a:lstStyle/>
           <a:p>
             <a:pPr algn="ctr"/>
+            <a:endParaRPr/>
           </a:p>
         </p:txBody>
       </p:sp>
@@ -4974,7 +5027,7 @@
           <a:noFill/>
         </p:spPr>
         <p:txBody>
-          <a:bodyPr wrap="square" lIns="0" rIns="0" tIns="0" bIns="0">
+          <a:bodyPr wrap="square" lIns="0" tIns="0" rIns="0" bIns="0">
             <a:spAutoFit/>
           </a:bodyPr>
           <a:lstStyle/>
@@ -5033,10 +5086,11 @@
           </a:fontRef>
         </p:style>
         <p:txBody>
-          <a:bodyPr rtlCol="0" anchor="ctr" wrap="square"/>
+          <a:bodyPr wrap="square" rtlCol="0" anchor="ctr"/>
           <a:lstStyle/>
           <a:p>
             <a:pPr algn="ctr"/>
+            <a:endParaRPr/>
           </a:p>
         </p:txBody>
       </p:sp>
@@ -5057,7 +5111,7 @@
           <a:noFill/>
         </p:spPr>
         <p:txBody>
-          <a:bodyPr wrap="square" lIns="0" rIns="0" tIns="0" bIns="0">
+          <a:bodyPr wrap="square" lIns="0" tIns="0" rIns="0" bIns="0">
             <a:spAutoFit/>
           </a:bodyPr>
           <a:lstStyle/>
@@ -5118,7 +5172,7 @@
           </a:fontRef>
         </p:style>
         <p:txBody>
-          <a:bodyPr rtlCol="0" anchor="ctr" wrap="square" lIns="209550" tIns="0"/>
+          <a:bodyPr wrap="square" lIns="209550" tIns="0" rtlCol="0" anchor="ctr"/>
           <a:lstStyle/>
           <a:p>
             <a:pPr algn="l">
@@ -5175,10 +5229,11 @@
           </a:fontRef>
         </p:style>
         <p:txBody>
-          <a:bodyPr rtlCol="0" anchor="ctr" wrap="square"/>
+          <a:bodyPr wrap="square" rtlCol="0" anchor="ctr"/>
           <a:lstStyle/>
           <a:p>
             <a:pPr algn="ctr"/>
+            <a:endParaRPr/>
           </a:p>
         </p:txBody>
       </p:sp>
@@ -5191,7 +5246,7 @@
 </file>
 
 <file path=ppt/slides/slide11.xml><?xml version="1.0" encoding="utf-8"?>
-<p:sld xmlns:a="http://schemas.openxmlformats.org/drawingml/2006/main" xmlns:p="http://schemas.openxmlformats.org/presentationml/2006/main" xmlns:r="http://schemas.openxmlformats.org/officeDocument/2006/relationships">
+<p:sld xmlns:a="http://schemas.openxmlformats.org/drawingml/2006/main" xmlns:r="http://schemas.openxmlformats.org/officeDocument/2006/relationships" xmlns:p="http://schemas.openxmlformats.org/presentationml/2006/main">
   <p:cSld>
     <p:spTree>
       <p:nvGrpSpPr>
@@ -5199,7 +5254,14 @@
         <p:cNvGrpSpPr/>
         <p:nvPr/>
       </p:nvGrpSpPr>
-      <p:grpSpPr/>
+      <p:grpSpPr>
+        <a:xfrm>
+          <a:off x="0" y="0"/>
+          <a:ext cx="0" cy="0"/>
+          <a:chOff x="0" y="0"/>
+          <a:chExt cx="0" cy="0"/>
+        </a:xfrm>
+      </p:grpSpPr>
       <p:sp>
         <p:nvSpPr>
           <p:cNvPr id="2" name="TextBox 1"/>
@@ -5217,7 +5279,7 @@
           <a:noFill/>
         </p:spPr>
         <p:txBody>
-          <a:bodyPr wrap="square" lIns="0" rIns="0" tIns="0" bIns="0">
+          <a:bodyPr wrap="square" lIns="0" tIns="0" rIns="0" bIns="0">
             <a:spAutoFit/>
           </a:bodyPr>
           <a:lstStyle/>
@@ -5276,10 +5338,11 @@
           </a:fontRef>
         </p:style>
         <p:txBody>
-          <a:bodyPr rtlCol="0" anchor="ctr" wrap="square"/>
+          <a:bodyPr wrap="square" rtlCol="0" anchor="ctr"/>
           <a:lstStyle/>
           <a:p>
             <a:pPr algn="ctr"/>
+            <a:endParaRPr/>
           </a:p>
         </p:txBody>
       </p:sp>
@@ -5300,7 +5363,7 @@
           <a:noFill/>
         </p:spPr>
         <p:txBody>
-          <a:bodyPr wrap="square" lIns="0" rIns="0" tIns="0" bIns="0">
+          <a:bodyPr wrap="square" lIns="0" tIns="0" rIns="0" bIns="0">
             <a:spAutoFit/>
           </a:bodyPr>
           <a:lstStyle/>
@@ -5339,7 +5402,7 @@
           <a:noFill/>
         </p:spPr>
         <p:txBody>
-          <a:bodyPr wrap="square" lIns="0" rIns="0" tIns="0" bIns="0">
+          <a:bodyPr wrap="square" lIns="0" tIns="0" rIns="0" bIns="0">
             <a:spAutoFit/>
           </a:bodyPr>
           <a:lstStyle/>
@@ -5378,7 +5441,7 @@
           <a:noFill/>
         </p:spPr>
         <p:txBody>
-          <a:bodyPr wrap="square" lIns="0" rIns="0" tIns="0" bIns="0">
+          <a:bodyPr wrap="square" lIns="0" tIns="0" rIns="0" bIns="0">
             <a:spAutoFit/>
           </a:bodyPr>
           <a:lstStyle/>
@@ -5441,10 +5504,11 @@
           </a:fontRef>
         </p:style>
         <p:txBody>
-          <a:bodyPr rtlCol="0" anchor="ctr" wrap="square"/>
+          <a:bodyPr wrap="square" rtlCol="0" anchor="ctr"/>
           <a:lstStyle/>
           <a:p>
             <a:pPr algn="ctr"/>
+            <a:endParaRPr/>
           </a:p>
         </p:txBody>
       </p:sp>
@@ -5485,10 +5549,11 @@
           </a:fontRef>
         </p:style>
         <p:txBody>
-          <a:bodyPr rtlCol="0" anchor="ctr" wrap="square"/>
+          <a:bodyPr wrap="square" rtlCol="0" anchor="ctr"/>
           <a:lstStyle/>
           <a:p>
             <a:pPr algn="ctr"/>
+            <a:endParaRPr/>
           </a:p>
         </p:txBody>
       </p:sp>
@@ -5529,7 +5594,7 @@
           </a:fontRef>
         </p:style>
         <p:txBody>
-          <a:bodyPr rtlCol="0" anchor="ctr" wrap="none" lIns="0" rIns="0" tIns="0" bIns="0"/>
+          <a:bodyPr wrap="none" lIns="0" tIns="0" rIns="0" bIns="0" rtlCol="0" anchor="ctr"/>
           <a:lstStyle/>
           <a:p>
             <a:pPr algn="ctr">
@@ -5566,7 +5631,7 @@
           <a:noFill/>
         </p:spPr>
         <p:txBody>
-          <a:bodyPr wrap="square" lIns="0" rIns="0" tIns="0" bIns="0">
+          <a:bodyPr wrap="square" lIns="0" tIns="0" rIns="0" bIns="0">
             <a:spAutoFit/>
           </a:bodyPr>
           <a:lstStyle/>
@@ -5661,10 +5726,11 @@
           </a:fontRef>
         </p:style>
         <p:txBody>
-          <a:bodyPr rtlCol="0" anchor="ctr" wrap="square"/>
+          <a:bodyPr wrap="square" rtlCol="0" anchor="ctr"/>
           <a:lstStyle/>
           <a:p>
             <a:pPr algn="ctr"/>
+            <a:endParaRPr/>
           </a:p>
         </p:txBody>
       </p:sp>
@@ -5705,10 +5771,11 @@
           </a:fontRef>
         </p:style>
         <p:txBody>
-          <a:bodyPr rtlCol="0" anchor="ctr" wrap="square"/>
+          <a:bodyPr wrap="square" rtlCol="0" anchor="ctr"/>
           <a:lstStyle/>
           <a:p>
             <a:pPr algn="ctr"/>
+            <a:endParaRPr/>
           </a:p>
         </p:txBody>
       </p:sp>
@@ -5749,7 +5816,7 @@
           </a:fontRef>
         </p:style>
         <p:txBody>
-          <a:bodyPr rtlCol="0" anchor="ctr" wrap="none" lIns="0" rIns="0" tIns="0" bIns="0"/>
+          <a:bodyPr wrap="none" lIns="0" tIns="0" rIns="0" bIns="0" rtlCol="0" anchor="ctr"/>
           <a:lstStyle/>
           <a:p>
             <a:pPr algn="ctr">
@@ -5786,7 +5853,7 @@
           <a:noFill/>
         </p:spPr>
         <p:txBody>
-          <a:bodyPr wrap="square" lIns="0" rIns="0" tIns="0" bIns="0">
+          <a:bodyPr wrap="square" lIns="0" tIns="0" rIns="0" bIns="0">
             <a:spAutoFit/>
           </a:bodyPr>
           <a:lstStyle/>
@@ -5877,10 +5944,11 @@
           </a:fontRef>
         </p:style>
         <p:txBody>
-          <a:bodyPr rtlCol="0" anchor="ctr" wrap="square"/>
+          <a:bodyPr wrap="square" rtlCol="0" anchor="ctr"/>
           <a:lstStyle/>
           <a:p>
             <a:pPr algn="ctr"/>
+            <a:endParaRPr/>
           </a:p>
         </p:txBody>
       </p:sp>
@@ -5901,7 +5969,7 @@
           <a:noFill/>
         </p:spPr>
         <p:txBody>
-          <a:bodyPr wrap="square" lIns="0" rIns="0" tIns="0" bIns="0">
+          <a:bodyPr wrap="square" lIns="0" tIns="0" rIns="0" bIns="0">
             <a:spAutoFit/>
           </a:bodyPr>
           <a:lstStyle/>
@@ -5962,7 +6030,7 @@
           </a:fontRef>
         </p:style>
         <p:txBody>
-          <a:bodyPr rtlCol="0" anchor="ctr" wrap="square" lIns="209550" tIns="0"/>
+          <a:bodyPr wrap="square" lIns="209550" tIns="0" rtlCol="0" anchor="ctr"/>
           <a:lstStyle/>
           <a:p>
             <a:pPr algn="l">
@@ -6019,10 +6087,11 @@
           </a:fontRef>
         </p:style>
         <p:txBody>
-          <a:bodyPr rtlCol="0" anchor="ctr" wrap="square"/>
+          <a:bodyPr wrap="square" rtlCol="0" anchor="ctr"/>
           <a:lstStyle/>
           <a:p>
             <a:pPr algn="ctr"/>
+            <a:endParaRPr/>
           </a:p>
         </p:txBody>
       </p:sp>
@@ -6035,7 +6104,7 @@
 </file>
 
 <file path=ppt/slides/slide2.xml><?xml version="1.0" encoding="utf-8"?>
-<p:sld xmlns:a="http://schemas.openxmlformats.org/drawingml/2006/main" xmlns:p="http://schemas.openxmlformats.org/presentationml/2006/main" xmlns:r="http://schemas.openxmlformats.org/officeDocument/2006/relationships">
+<p:sld xmlns:a="http://schemas.openxmlformats.org/drawingml/2006/main" xmlns:r="http://schemas.openxmlformats.org/officeDocument/2006/relationships" xmlns:p="http://schemas.openxmlformats.org/presentationml/2006/main">
   <p:cSld>
     <p:spTree>
       <p:nvGrpSpPr>
@@ -6043,7 +6112,14 @@
         <p:cNvGrpSpPr/>
         <p:nvPr/>
       </p:nvGrpSpPr>
-      <p:grpSpPr/>
+      <p:grpSpPr>
+        <a:xfrm>
+          <a:off x="0" y="0"/>
+          <a:ext cx="0" cy="0"/>
+          <a:chOff x="0" y="0"/>
+          <a:chExt cx="0" cy="0"/>
+        </a:xfrm>
+      </p:grpSpPr>
       <p:sp>
         <p:nvSpPr>
           <p:cNvPr id="2" name="TextBox 1"/>
@@ -6061,7 +6137,7 @@
           <a:noFill/>
         </p:spPr>
         <p:txBody>
-          <a:bodyPr wrap="square" lIns="0" rIns="0" tIns="0" bIns="0">
+          <a:bodyPr wrap="square" lIns="0" tIns="0" rIns="0" bIns="0">
             <a:spAutoFit/>
           </a:bodyPr>
           <a:lstStyle/>
@@ -6120,10 +6196,11 @@
           </a:fontRef>
         </p:style>
         <p:txBody>
-          <a:bodyPr rtlCol="0" anchor="ctr" wrap="square"/>
+          <a:bodyPr wrap="square" rtlCol="0" anchor="ctr"/>
           <a:lstStyle/>
           <a:p>
             <a:pPr algn="ctr"/>
+            <a:endParaRPr/>
           </a:p>
         </p:txBody>
       </p:sp>
@@ -6144,7 +6221,7 @@
           <a:noFill/>
         </p:spPr>
         <p:txBody>
-          <a:bodyPr wrap="square" lIns="0" rIns="0" tIns="0" bIns="0">
+          <a:bodyPr wrap="square" lIns="0" tIns="0" rIns="0" bIns="0">
             <a:spAutoFit/>
           </a:bodyPr>
           <a:lstStyle/>
@@ -6183,7 +6260,7 @@
           <a:noFill/>
         </p:spPr>
         <p:txBody>
-          <a:bodyPr wrap="square" lIns="0" rIns="0" tIns="0" bIns="0">
+          <a:bodyPr wrap="square" lIns="0" tIns="0" rIns="0" bIns="0">
             <a:spAutoFit/>
           </a:bodyPr>
           <a:lstStyle/>
@@ -6246,6 +6323,7 @@
           <a:lstStyle/>
           <a:p>
             <a:pPr algn="ctr"/>
+            <a:endParaRPr/>
           </a:p>
         </p:txBody>
       </p:sp>
@@ -6266,7 +6344,7 @@
           <a:noFill/>
         </p:spPr>
         <p:txBody>
-          <a:bodyPr wrap="square" lIns="0" rIns="0" tIns="0" bIns="0">
+          <a:bodyPr wrap="square" lIns="0" tIns="0" rIns="0" bIns="0">
             <a:spAutoFit/>
           </a:bodyPr>
           <a:lstStyle/>
@@ -6283,8 +6361,158 @@
                 </a:solidFill>
                 <a:latin typeface="Segoe UI"/>
               </a:rPr>
-              <a:t>Dokument jest — tylko nie wiadomo, w którym folderze i która wersja obowiązuje</a:t>
-            </a:r>
+              <a:t>Dokument</a:t>
+            </a:r>
+            <a:r>
+              <a:rPr sz="1700" b="0" dirty="0">
+                <a:solidFill>
+                  <a:srgbClr val="1E293B"/>
+                </a:solidFill>
+                <a:latin typeface="Segoe UI"/>
+              </a:rPr>
+              <a:t> jest — </a:t>
+            </a:r>
+            <a:r>
+              <a:rPr sz="1700" b="0" dirty="0" err="1">
+                <a:solidFill>
+                  <a:srgbClr val="1E293B"/>
+                </a:solidFill>
+                <a:latin typeface="Segoe UI"/>
+              </a:rPr>
+              <a:t>tylko</a:t>
+            </a:r>
+            <a:r>
+              <a:rPr sz="1700" b="0" dirty="0">
+                <a:solidFill>
+                  <a:srgbClr val="1E293B"/>
+                </a:solidFill>
+                <a:latin typeface="Segoe UI"/>
+              </a:rPr>
+              <a:t> </a:t>
+            </a:r>
+            <a:r>
+              <a:rPr sz="1700" b="0" dirty="0" err="1">
+                <a:solidFill>
+                  <a:srgbClr val="1E293B"/>
+                </a:solidFill>
+                <a:latin typeface="Segoe UI"/>
+              </a:rPr>
+              <a:t>nie</a:t>
+            </a:r>
+            <a:r>
+              <a:rPr sz="1700" b="0" dirty="0">
+                <a:solidFill>
+                  <a:srgbClr val="1E293B"/>
+                </a:solidFill>
+                <a:latin typeface="Segoe UI"/>
+              </a:rPr>
+              <a:t> </a:t>
+            </a:r>
+            <a:r>
+              <a:rPr sz="1700" b="0" dirty="0" err="1">
+                <a:solidFill>
+                  <a:srgbClr val="1E293B"/>
+                </a:solidFill>
+                <a:latin typeface="Segoe UI"/>
+              </a:rPr>
+              <a:t>wiadomo</a:t>
+            </a:r>
+            <a:r>
+              <a:rPr sz="1700" b="0" dirty="0">
+                <a:solidFill>
+                  <a:srgbClr val="1E293B"/>
+                </a:solidFill>
+                <a:latin typeface="Segoe UI"/>
+              </a:rPr>
+              <a:t>, w </a:t>
+            </a:r>
+            <a:r>
+              <a:rPr sz="1700" b="0" dirty="0" err="1">
+                <a:solidFill>
+                  <a:srgbClr val="1E293B"/>
+                </a:solidFill>
+                <a:latin typeface="Segoe UI"/>
+              </a:rPr>
+              <a:t>którym</a:t>
+            </a:r>
+            <a:r>
+              <a:rPr sz="1700" b="0" dirty="0">
+                <a:solidFill>
+                  <a:srgbClr val="1E293B"/>
+                </a:solidFill>
+                <a:latin typeface="Segoe UI"/>
+              </a:rPr>
+              <a:t> </a:t>
+            </a:r>
+            <a:r>
+              <a:rPr sz="1700" b="0" dirty="0" err="1">
+                <a:solidFill>
+                  <a:srgbClr val="1E293B"/>
+                </a:solidFill>
+                <a:latin typeface="Segoe UI"/>
+              </a:rPr>
+              <a:t>folderze</a:t>
+            </a:r>
+            <a:r>
+              <a:rPr sz="1700" b="0" dirty="0">
+                <a:solidFill>
+                  <a:srgbClr val="1E293B"/>
+                </a:solidFill>
+                <a:latin typeface="Segoe UI"/>
+              </a:rPr>
+              <a:t> i </a:t>
+            </a:r>
+            <a:r>
+              <a:rPr sz="1700" b="0" dirty="0" err="1">
+                <a:solidFill>
+                  <a:srgbClr val="1E293B"/>
+                </a:solidFill>
+                <a:latin typeface="Segoe UI"/>
+              </a:rPr>
+              <a:t>która</a:t>
+            </a:r>
+            <a:r>
+              <a:rPr sz="1700" b="0" dirty="0">
+                <a:solidFill>
+                  <a:srgbClr val="1E293B"/>
+                </a:solidFill>
+                <a:latin typeface="Segoe UI"/>
+              </a:rPr>
+              <a:t> </a:t>
+            </a:r>
+            <a:r>
+              <a:rPr sz="1700" b="0" dirty="0" err="1">
+                <a:solidFill>
+                  <a:srgbClr val="1E293B"/>
+                </a:solidFill>
+                <a:latin typeface="Segoe UI"/>
+              </a:rPr>
+              <a:t>wersja</a:t>
+            </a:r>
+            <a:r>
+              <a:rPr sz="1700" b="0" dirty="0">
+                <a:solidFill>
+                  <a:srgbClr val="1E293B"/>
+                </a:solidFill>
+                <a:latin typeface="Segoe UI"/>
+              </a:rPr>
+              <a:t> </a:t>
+            </a:r>
+            <a:r>
+              <a:rPr sz="1700" b="0" dirty="0" err="1">
+                <a:solidFill>
+                  <a:srgbClr val="1E293B"/>
+                </a:solidFill>
+                <a:latin typeface="Segoe UI"/>
+              </a:rPr>
+              <a:t>obowiązuje</a:t>
+            </a:r>
+            <a:endParaRPr sz="1700" b="0" dirty="0">
+              <a:solidFill>
+                <a:srgbClr val="1E293B"/>
+              </a:solidFill>
+              <a:latin typeface="Segoe UI"/>
+            </a:endParaRPr>
           </a:p>
         </p:txBody>
       </p:sp>
@@ -6329,6 +6557,7 @@
           <a:lstStyle/>
           <a:p>
             <a:pPr algn="ctr"/>
+            <a:endParaRPr/>
           </a:p>
         </p:txBody>
       </p:sp>
@@ -6349,7 +6578,7 @@
           <a:noFill/>
         </p:spPr>
         <p:txBody>
-          <a:bodyPr wrap="square" lIns="0" rIns="0" tIns="0" bIns="0">
+          <a:bodyPr wrap="square" lIns="0" tIns="0" rIns="0" bIns="0">
             <a:spAutoFit/>
           </a:bodyPr>
           <a:lstStyle/>
@@ -6412,6 +6641,7 @@
           <a:lstStyle/>
           <a:p>
             <a:pPr algn="ctr"/>
+            <a:endParaRPr/>
           </a:p>
         </p:txBody>
       </p:sp>
@@ -6432,7 +6662,7 @@
           <a:noFill/>
         </p:spPr>
         <p:txBody>
-          <a:bodyPr wrap="square" lIns="0" rIns="0" tIns="0" bIns="0">
+          <a:bodyPr wrap="square" lIns="0" tIns="0" rIns="0" bIns="0">
             <a:spAutoFit/>
           </a:bodyPr>
           <a:lstStyle/>
@@ -6495,6 +6725,7 @@
           <a:lstStyle/>
           <a:p>
             <a:pPr algn="ctr"/>
+            <a:endParaRPr/>
           </a:p>
         </p:txBody>
       </p:sp>
@@ -6515,7 +6746,7 @@
           <a:noFill/>
         </p:spPr>
         <p:txBody>
-          <a:bodyPr wrap="square" lIns="0" rIns="0" tIns="0" bIns="0">
+          <a:bodyPr wrap="square" lIns="0" tIns="0" rIns="0" bIns="0">
             <a:spAutoFit/>
           </a:bodyPr>
           <a:lstStyle/>
@@ -6578,6 +6809,7 @@
           <a:lstStyle/>
           <a:p>
             <a:pPr algn="ctr"/>
+            <a:endParaRPr/>
           </a:p>
         </p:txBody>
       </p:sp>
@@ -6598,7 +6830,7 @@
           <a:noFill/>
         </p:spPr>
         <p:txBody>
-          <a:bodyPr wrap="square" lIns="0" rIns="0" tIns="0" bIns="0">
+          <a:bodyPr wrap="square" lIns="0" tIns="0" rIns="0" bIns="0">
             <a:spAutoFit/>
           </a:bodyPr>
           <a:lstStyle/>
@@ -6659,7 +6891,7 @@
           </a:fontRef>
         </p:style>
         <p:txBody>
-          <a:bodyPr rtlCol="0" anchor="ctr" wrap="square" lIns="209550" tIns="0"/>
+          <a:bodyPr wrap="square" lIns="209550" tIns="0" rtlCol="0" anchor="ctr"/>
           <a:lstStyle/>
           <a:p>
             <a:pPr algn="l">
@@ -6716,10 +6948,11 @@
           </a:fontRef>
         </p:style>
         <p:txBody>
-          <a:bodyPr rtlCol="0" anchor="ctr" wrap="square"/>
+          <a:bodyPr wrap="square" rtlCol="0" anchor="ctr"/>
           <a:lstStyle/>
           <a:p>
             <a:pPr algn="ctr"/>
+            <a:endParaRPr/>
           </a:p>
         </p:txBody>
       </p:sp>
@@ -6732,7 +6965,7 @@
 </file>
 
 <file path=ppt/slides/slide3.xml><?xml version="1.0" encoding="utf-8"?>
-<p:sld xmlns:a="http://schemas.openxmlformats.org/drawingml/2006/main" xmlns:p="http://schemas.openxmlformats.org/presentationml/2006/main" xmlns:r="http://schemas.openxmlformats.org/officeDocument/2006/relationships">
+<p:sld xmlns:a="http://schemas.openxmlformats.org/drawingml/2006/main" xmlns:r="http://schemas.openxmlformats.org/officeDocument/2006/relationships" xmlns:p="http://schemas.openxmlformats.org/presentationml/2006/main">
   <p:cSld>
     <p:spTree>
       <p:nvGrpSpPr>
@@ -6740,7 +6973,14 @@
         <p:cNvGrpSpPr/>
         <p:nvPr/>
       </p:nvGrpSpPr>
-      <p:grpSpPr/>
+      <p:grpSpPr>
+        <a:xfrm>
+          <a:off x="0" y="0"/>
+          <a:ext cx="0" cy="0"/>
+          <a:chOff x="0" y="0"/>
+          <a:chExt cx="0" cy="0"/>
+        </a:xfrm>
+      </p:grpSpPr>
       <p:sp>
         <p:nvSpPr>
           <p:cNvPr id="2" name="TextBox 1"/>
@@ -6758,7 +6998,7 @@
           <a:noFill/>
         </p:spPr>
         <p:txBody>
-          <a:bodyPr wrap="square" lIns="0" rIns="0" tIns="0" bIns="0">
+          <a:bodyPr wrap="square" lIns="0" tIns="0" rIns="0" bIns="0">
             <a:spAutoFit/>
           </a:bodyPr>
           <a:lstStyle/>
@@ -6817,10 +7057,11 @@
           </a:fontRef>
         </p:style>
         <p:txBody>
-          <a:bodyPr rtlCol="0" anchor="ctr" wrap="square"/>
+          <a:bodyPr wrap="square" rtlCol="0" anchor="ctr"/>
           <a:lstStyle/>
           <a:p>
             <a:pPr algn="ctr"/>
+            <a:endParaRPr/>
           </a:p>
         </p:txBody>
       </p:sp>
@@ -6841,7 +7082,7 @@
           <a:noFill/>
         </p:spPr>
         <p:txBody>
-          <a:bodyPr wrap="square" lIns="0" rIns="0" tIns="0" bIns="0">
+          <a:bodyPr wrap="square" lIns="0" tIns="0" rIns="0" bIns="0">
             <a:spAutoFit/>
           </a:bodyPr>
           <a:lstStyle/>
@@ -6880,7 +7121,7 @@
           <a:noFill/>
         </p:spPr>
         <p:txBody>
-          <a:bodyPr wrap="square" lIns="0" rIns="0" tIns="0" bIns="0">
+          <a:bodyPr wrap="square" lIns="0" tIns="0" rIns="0" bIns="0">
             <a:spAutoFit/>
           </a:bodyPr>
           <a:lstStyle/>
@@ -6943,6 +7184,7 @@
           <a:lstStyle/>
           <a:p>
             <a:pPr algn="ctr"/>
+            <a:endParaRPr/>
           </a:p>
         </p:txBody>
       </p:sp>
@@ -6963,7 +7205,7 @@
           <a:noFill/>
         </p:spPr>
         <p:txBody>
-          <a:bodyPr wrap="square" lIns="0" rIns="0" tIns="0" bIns="0">
+          <a:bodyPr wrap="square" lIns="0" tIns="0" rIns="0" bIns="0">
             <a:spAutoFit/>
           </a:bodyPr>
           <a:lstStyle/>
@@ -7026,6 +7268,7 @@
           <a:lstStyle/>
           <a:p>
             <a:pPr algn="ctr"/>
+            <a:endParaRPr/>
           </a:p>
         </p:txBody>
       </p:sp>
@@ -7046,7 +7289,7 @@
           <a:noFill/>
         </p:spPr>
         <p:txBody>
-          <a:bodyPr wrap="square" lIns="0" rIns="0" tIns="0" bIns="0">
+          <a:bodyPr wrap="square" lIns="0" tIns="0" rIns="0" bIns="0">
             <a:spAutoFit/>
           </a:bodyPr>
           <a:lstStyle/>
@@ -7109,6 +7352,7 @@
           <a:lstStyle/>
           <a:p>
             <a:pPr algn="ctr"/>
+            <a:endParaRPr/>
           </a:p>
         </p:txBody>
       </p:sp>
@@ -7129,7 +7373,7 @@
           <a:noFill/>
         </p:spPr>
         <p:txBody>
-          <a:bodyPr wrap="square" lIns="0" rIns="0" tIns="0" bIns="0">
+          <a:bodyPr wrap="square" lIns="0" tIns="0" rIns="0" bIns="0">
             <a:spAutoFit/>
           </a:bodyPr>
           <a:lstStyle/>
@@ -7192,6 +7436,7 @@
           <a:lstStyle/>
           <a:p>
             <a:pPr algn="ctr"/>
+            <a:endParaRPr/>
           </a:p>
         </p:txBody>
       </p:sp>
@@ -7212,7 +7457,7 @@
           <a:noFill/>
         </p:spPr>
         <p:txBody>
-          <a:bodyPr wrap="square" lIns="0" rIns="0" tIns="0" bIns="0">
+          <a:bodyPr wrap="square" lIns="0" tIns="0" rIns="0" bIns="0">
             <a:spAutoFit/>
           </a:bodyPr>
           <a:lstStyle/>
@@ -7275,6 +7520,7 @@
           <a:lstStyle/>
           <a:p>
             <a:pPr algn="ctr"/>
+            <a:endParaRPr/>
           </a:p>
         </p:txBody>
       </p:sp>
@@ -7295,7 +7541,7 @@
           <a:noFill/>
         </p:spPr>
         <p:txBody>
-          <a:bodyPr wrap="square" lIns="0" rIns="0" tIns="0" bIns="0">
+          <a:bodyPr wrap="square" lIns="0" tIns="0" rIns="0" bIns="0">
             <a:spAutoFit/>
           </a:bodyPr>
           <a:lstStyle/>
@@ -7326,7 +7572,7 @@
           <p:nvPr/>
         </p:nvPicPr>
         <p:blipFill>
-          <a:blip r:embed="rId2"/>
+          <a:blip r:embed="rId3"/>
           <a:stretch>
             <a:fillRect/>
           </a:stretch>
@@ -7380,7 +7626,7 @@
           </a:fontRef>
         </p:style>
         <p:txBody>
-          <a:bodyPr rtlCol="0" anchor="ctr" wrap="square" lIns="209550" tIns="0"/>
+          <a:bodyPr wrap="square" lIns="209550" tIns="0" rtlCol="0" anchor="ctr"/>
           <a:lstStyle/>
           <a:p>
             <a:pPr algn="l">
@@ -7437,10 +7683,11 @@
           </a:fontRef>
         </p:style>
         <p:txBody>
-          <a:bodyPr rtlCol="0" anchor="ctr" wrap="square"/>
+          <a:bodyPr wrap="square" rtlCol="0" anchor="ctr"/>
           <a:lstStyle/>
           <a:p>
             <a:pPr algn="ctr"/>
+            <a:endParaRPr/>
           </a:p>
         </p:txBody>
       </p:sp>
@@ -7453,7 +7700,7 @@
 </file>
 
 <file path=ppt/slides/slide4.xml><?xml version="1.0" encoding="utf-8"?>
-<p:sld xmlns:a="http://schemas.openxmlformats.org/drawingml/2006/main" xmlns:p="http://schemas.openxmlformats.org/presentationml/2006/main" xmlns:r="http://schemas.openxmlformats.org/officeDocument/2006/relationships">
+<p:sld xmlns:a="http://schemas.openxmlformats.org/drawingml/2006/main" xmlns:r="http://schemas.openxmlformats.org/officeDocument/2006/relationships" xmlns:p="http://schemas.openxmlformats.org/presentationml/2006/main">
   <p:cSld>
     <p:spTree>
       <p:nvGrpSpPr>
@@ -7461,7 +7708,14 @@
         <p:cNvGrpSpPr/>
         <p:nvPr/>
       </p:nvGrpSpPr>
-      <p:grpSpPr/>
+      <p:grpSpPr>
+        <a:xfrm>
+          <a:off x="0" y="0"/>
+          <a:ext cx="0" cy="0"/>
+          <a:chOff x="0" y="0"/>
+          <a:chExt cx="0" cy="0"/>
+        </a:xfrm>
+      </p:grpSpPr>
       <p:sp>
         <p:nvSpPr>
           <p:cNvPr id="2" name="TextBox 1"/>
@@ -7479,7 +7733,7 @@
           <a:noFill/>
         </p:spPr>
         <p:txBody>
-          <a:bodyPr wrap="square" lIns="0" rIns="0" tIns="0" bIns="0">
+          <a:bodyPr wrap="square" lIns="0" tIns="0" rIns="0" bIns="0">
             <a:spAutoFit/>
           </a:bodyPr>
           <a:lstStyle/>
@@ -7538,10 +7792,11 @@
           </a:fontRef>
         </p:style>
         <p:txBody>
-          <a:bodyPr rtlCol="0" anchor="ctr" wrap="square"/>
+          <a:bodyPr wrap="square" rtlCol="0" anchor="ctr"/>
           <a:lstStyle/>
           <a:p>
             <a:pPr algn="ctr"/>
+            <a:endParaRPr/>
           </a:p>
         </p:txBody>
       </p:sp>
@@ -7562,7 +7817,7 @@
           <a:noFill/>
         </p:spPr>
         <p:txBody>
-          <a:bodyPr wrap="square" lIns="0" rIns="0" tIns="0" bIns="0">
+          <a:bodyPr wrap="square" lIns="0" tIns="0" rIns="0" bIns="0">
             <a:spAutoFit/>
           </a:bodyPr>
           <a:lstStyle/>
@@ -7601,7 +7856,7 @@
           <a:noFill/>
         </p:spPr>
         <p:txBody>
-          <a:bodyPr wrap="square" lIns="0" rIns="0" tIns="0" bIns="0">
+          <a:bodyPr wrap="square" lIns="0" tIns="0" rIns="0" bIns="0">
             <a:spAutoFit/>
           </a:bodyPr>
           <a:lstStyle/>
@@ -7662,10 +7917,11 @@
           </a:fontRef>
         </p:style>
         <p:txBody>
-          <a:bodyPr rtlCol="0" anchor="ctr" wrap="square"/>
+          <a:bodyPr wrap="square" rtlCol="0" anchor="ctr"/>
           <a:lstStyle/>
           <a:p>
             <a:pPr algn="ctr"/>
+            <a:endParaRPr/>
           </a:p>
         </p:txBody>
       </p:sp>
@@ -7686,7 +7942,7 @@
           <a:noFill/>
         </p:spPr>
         <p:txBody>
-          <a:bodyPr wrap="square" lIns="0" rIns="0" tIns="0" bIns="0">
+          <a:bodyPr wrap="square" lIns="0" tIns="0" rIns="0" bIns="0">
             <a:spAutoFit/>
           </a:bodyPr>
           <a:lstStyle/>
@@ -7747,10 +8003,11 @@
           </a:fontRef>
         </p:style>
         <p:txBody>
-          <a:bodyPr rtlCol="0" anchor="ctr" wrap="square"/>
+          <a:bodyPr wrap="square" rtlCol="0" anchor="ctr"/>
           <a:lstStyle/>
           <a:p>
             <a:pPr algn="ctr"/>
+            <a:endParaRPr/>
           </a:p>
         </p:txBody>
       </p:sp>
@@ -7771,7 +8028,7 @@
           <a:noFill/>
         </p:spPr>
         <p:txBody>
-          <a:bodyPr wrap="square" lIns="0" rIns="0" tIns="0" bIns="0">
+          <a:bodyPr wrap="square" lIns="0" tIns="0" rIns="0" bIns="0">
             <a:spAutoFit/>
           </a:bodyPr>
           <a:lstStyle/>
@@ -7848,10 +8105,11 @@
           </a:fontRef>
         </p:style>
         <p:txBody>
-          <a:bodyPr rtlCol="0" anchor="ctr" wrap="square"/>
+          <a:bodyPr wrap="square" rtlCol="0" anchor="ctr"/>
           <a:lstStyle/>
           <a:p>
             <a:pPr algn="ctr"/>
+            <a:endParaRPr/>
           </a:p>
         </p:txBody>
       </p:sp>
@@ -7872,7 +8130,7 @@
           <a:noFill/>
         </p:spPr>
         <p:txBody>
-          <a:bodyPr wrap="square" lIns="0" rIns="0" tIns="0" bIns="0">
+          <a:bodyPr wrap="square" lIns="0" tIns="0" rIns="0" bIns="0">
             <a:spAutoFit/>
           </a:bodyPr>
           <a:lstStyle/>
@@ -7949,10 +8207,11 @@
           </a:fontRef>
         </p:style>
         <p:txBody>
-          <a:bodyPr rtlCol="0" anchor="ctr" wrap="square"/>
+          <a:bodyPr wrap="square" rtlCol="0" anchor="ctr"/>
           <a:lstStyle/>
           <a:p>
             <a:pPr algn="ctr"/>
+            <a:endParaRPr/>
           </a:p>
         </p:txBody>
       </p:sp>
@@ -7973,7 +8232,7 @@
           <a:noFill/>
         </p:spPr>
         <p:txBody>
-          <a:bodyPr wrap="square" lIns="0" rIns="0" tIns="0" bIns="0">
+          <a:bodyPr wrap="square" lIns="0" tIns="0" rIns="0" bIns="0">
             <a:spAutoFit/>
           </a:bodyPr>
           <a:lstStyle/>
@@ -8052,6 +8311,7 @@
           <a:lstStyle/>
           <a:p>
             <a:pPr algn="ctr"/>
+            <a:endParaRPr/>
           </a:p>
         </p:txBody>
       </p:sp>
@@ -8064,7 +8324,7 @@
         <p:spPr>
           <a:xfrm>
             <a:off x="8229600" y="2876550"/>
-            <a:ext cx="990600" cy="476250"/>
+            <a:ext cx="990600" cy="530145"/>
           </a:xfrm>
           <a:prstGeom prst="rect">
             <a:avLst/>
@@ -8072,7 +8332,7 @@
           <a:noFill/>
         </p:spPr>
         <p:txBody>
-          <a:bodyPr wrap="square" lIns="0" rIns="0" tIns="0" bIns="0">
+          <a:bodyPr wrap="square" lIns="0" tIns="0" rIns="0" bIns="0">
             <a:spAutoFit/>
           </a:bodyPr>
           <a:lstStyle/>
@@ -8083,14 +8343,91 @@
               </a:lnSpc>
             </a:pPr>
             <a:r>
-              <a:rPr sz="950" b="1">
+              <a:rPr sz="950" b="1" dirty="0" err="1">
                 <a:solidFill>
                   <a:srgbClr val="0F9B8E"/>
                 </a:solidFill>
                 <a:latin typeface="Segoe UI"/>
               </a:rPr>
-              <a:t>brak połączenia z usługami zewnętrznymi</a:t>
-            </a:r>
+              <a:t>brak</a:t>
+            </a:r>
+            <a:r>
+              <a:rPr sz="950" b="1" dirty="0">
+                <a:solidFill>
+                  <a:srgbClr val="0F9B8E"/>
+                </a:solidFill>
+                <a:latin typeface="Segoe UI"/>
+              </a:rPr>
+              <a:t> </a:t>
+            </a:r>
+            <a:r>
+              <a:rPr sz="950" b="1" dirty="0" err="1">
+                <a:solidFill>
+                  <a:srgbClr val="0F9B8E"/>
+                </a:solidFill>
+                <a:latin typeface="Segoe UI"/>
+              </a:rPr>
+              <a:t>połączenia</a:t>
+            </a:r>
+            <a:r>
+              <a:rPr sz="950" b="1" dirty="0">
+                <a:solidFill>
+                  <a:srgbClr val="0F9B8E"/>
+                </a:solidFill>
+                <a:latin typeface="Segoe UI"/>
+              </a:rPr>
+              <a:t> </a:t>
+            </a:r>
+            <a:br>
+              <a:rPr lang="pl-PL" sz="950" b="1" dirty="0">
+                <a:solidFill>
+                  <a:srgbClr val="0F9B8E"/>
+                </a:solidFill>
+                <a:latin typeface="Segoe UI"/>
+              </a:rPr>
+            </a:br>
+            <a:r>
+              <a:rPr sz="950" b="1" dirty="0">
+                <a:solidFill>
+                  <a:srgbClr val="0F9B8E"/>
+                </a:solidFill>
+                <a:latin typeface="Segoe UI"/>
+              </a:rPr>
+              <a:t>z </a:t>
+            </a:r>
+            <a:r>
+              <a:rPr sz="950" b="1" dirty="0" err="1">
+                <a:solidFill>
+                  <a:srgbClr val="0F9B8E"/>
+                </a:solidFill>
+                <a:latin typeface="Segoe UI"/>
+              </a:rPr>
+              <a:t>usługami</a:t>
+            </a:r>
+            <a:r>
+              <a:rPr sz="950" b="1" dirty="0">
+                <a:solidFill>
+                  <a:srgbClr val="0F9B8E"/>
+                </a:solidFill>
+                <a:latin typeface="Segoe UI"/>
+              </a:rPr>
+              <a:t> </a:t>
+            </a:r>
+            <a:r>
+              <a:rPr sz="950" b="1" dirty="0" err="1">
+                <a:solidFill>
+                  <a:srgbClr val="0F9B8E"/>
+                </a:solidFill>
+                <a:latin typeface="Segoe UI"/>
+              </a:rPr>
+              <a:t>zewnętrznymi</a:t>
+            </a:r>
+            <a:endParaRPr sz="950" b="1" dirty="0">
+              <a:solidFill>
+                <a:srgbClr val="0F9B8E"/>
+              </a:solidFill>
+              <a:latin typeface="Segoe UI"/>
+            </a:endParaRPr>
           </a:p>
         </p:txBody>
       </p:sp>
@@ -8135,10 +8472,11 @@
           </a:fontRef>
         </p:style>
         <p:txBody>
-          <a:bodyPr rtlCol="0" anchor="ctr" wrap="square"/>
+          <a:bodyPr wrap="square" rtlCol="0" anchor="ctr"/>
           <a:lstStyle/>
           <a:p>
             <a:pPr algn="ctr"/>
+            <a:endParaRPr/>
           </a:p>
         </p:txBody>
       </p:sp>
@@ -8159,7 +8497,7 @@
           <a:noFill/>
         </p:spPr>
         <p:txBody>
-          <a:bodyPr wrap="square" lIns="0" rIns="0" tIns="0" bIns="0">
+          <a:bodyPr wrap="square" lIns="0" tIns="0" rIns="0" bIns="0">
             <a:spAutoFit/>
           </a:bodyPr>
           <a:lstStyle/>
@@ -8238,6 +8576,7 @@
           <a:lstStyle/>
           <a:p>
             <a:pPr algn="ctr"/>
+            <a:endParaRPr/>
           </a:p>
         </p:txBody>
       </p:sp>
@@ -8258,7 +8597,7 @@
           <a:noFill/>
         </p:spPr>
         <p:txBody>
-          <a:bodyPr wrap="square" lIns="0" rIns="0" tIns="0" bIns="0">
+          <a:bodyPr wrap="square" lIns="0" tIns="0" rIns="0" bIns="0">
             <a:spAutoFit/>
           </a:bodyPr>
           <a:lstStyle/>
@@ -8321,6 +8660,7 @@
           <a:lstStyle/>
           <a:p>
             <a:pPr algn="ctr"/>
+            <a:endParaRPr/>
           </a:p>
         </p:txBody>
       </p:sp>
@@ -8341,7 +8681,7 @@
           <a:noFill/>
         </p:spPr>
         <p:txBody>
-          <a:bodyPr wrap="square" lIns="0" rIns="0" tIns="0" bIns="0">
+          <a:bodyPr wrap="square" lIns="0" tIns="0" rIns="0" bIns="0">
             <a:spAutoFit/>
           </a:bodyPr>
           <a:lstStyle/>
@@ -8404,6 +8744,7 @@
           <a:lstStyle/>
           <a:p>
             <a:pPr algn="ctr"/>
+            <a:endParaRPr/>
           </a:p>
         </p:txBody>
       </p:sp>
@@ -8424,7 +8765,7 @@
           <a:noFill/>
         </p:spPr>
         <p:txBody>
-          <a:bodyPr wrap="square" lIns="0" rIns="0" tIns="0" bIns="0">
+          <a:bodyPr wrap="square" lIns="0" tIns="0" rIns="0" bIns="0">
             <a:spAutoFit/>
           </a:bodyPr>
           <a:lstStyle/>
@@ -8485,7 +8826,7 @@
           </a:fontRef>
         </p:style>
         <p:txBody>
-          <a:bodyPr rtlCol="0" anchor="ctr" wrap="square" lIns="209550" tIns="0"/>
+          <a:bodyPr wrap="square" lIns="209550" tIns="0" rtlCol="0" anchor="ctr"/>
           <a:lstStyle/>
           <a:p>
             <a:pPr algn="l">
@@ -8542,10 +8883,11 @@
           </a:fontRef>
         </p:style>
         <p:txBody>
-          <a:bodyPr rtlCol="0" anchor="ctr" wrap="square"/>
+          <a:bodyPr wrap="square" rtlCol="0" anchor="ctr"/>
           <a:lstStyle/>
           <a:p>
             <a:pPr algn="ctr"/>
+            <a:endParaRPr/>
           </a:p>
         </p:txBody>
       </p:sp>
@@ -8558,7 +8900,7 @@
 </file>
 
 <file path=ppt/slides/slide5.xml><?xml version="1.0" encoding="utf-8"?>
-<p:sld xmlns:a="http://schemas.openxmlformats.org/drawingml/2006/main" xmlns:p="http://schemas.openxmlformats.org/presentationml/2006/main" xmlns:r="http://schemas.openxmlformats.org/officeDocument/2006/relationships">
+<p:sld xmlns:a="http://schemas.openxmlformats.org/drawingml/2006/main" xmlns:r="http://schemas.openxmlformats.org/officeDocument/2006/relationships" xmlns:p="http://schemas.openxmlformats.org/presentationml/2006/main">
   <p:cSld>
     <p:spTree>
       <p:nvGrpSpPr>
@@ -8566,7 +8908,14 @@
         <p:cNvGrpSpPr/>
         <p:nvPr/>
       </p:nvGrpSpPr>
-      <p:grpSpPr/>
+      <p:grpSpPr>
+        <a:xfrm>
+          <a:off x="0" y="0"/>
+          <a:ext cx="0" cy="0"/>
+          <a:chOff x="0" y="0"/>
+          <a:chExt cx="0" cy="0"/>
+        </a:xfrm>
+      </p:grpSpPr>
       <p:sp>
         <p:nvSpPr>
           <p:cNvPr id="2" name="TextBox 1"/>
@@ -8584,7 +8933,7 @@
           <a:noFill/>
         </p:spPr>
         <p:txBody>
-          <a:bodyPr wrap="square" lIns="0" rIns="0" tIns="0" bIns="0">
+          <a:bodyPr wrap="square" lIns="0" tIns="0" rIns="0" bIns="0">
             <a:spAutoFit/>
           </a:bodyPr>
           <a:lstStyle/>
@@ -8643,10 +8992,11 @@
           </a:fontRef>
         </p:style>
         <p:txBody>
-          <a:bodyPr rtlCol="0" anchor="ctr" wrap="square"/>
+          <a:bodyPr wrap="square" rtlCol="0" anchor="ctr"/>
           <a:lstStyle/>
           <a:p>
             <a:pPr algn="ctr"/>
+            <a:endParaRPr/>
           </a:p>
         </p:txBody>
       </p:sp>
@@ -8667,7 +9017,7 @@
           <a:noFill/>
         </p:spPr>
         <p:txBody>
-          <a:bodyPr wrap="square" lIns="0" rIns="0" tIns="0" bIns="0">
+          <a:bodyPr wrap="square" lIns="0" tIns="0" rIns="0" bIns="0">
             <a:spAutoFit/>
           </a:bodyPr>
           <a:lstStyle/>
@@ -8706,7 +9056,7 @@
           <a:noFill/>
         </p:spPr>
         <p:txBody>
-          <a:bodyPr wrap="square" lIns="0" rIns="0" tIns="0" bIns="0">
+          <a:bodyPr wrap="square" lIns="0" tIns="0" rIns="0" bIns="0">
             <a:spAutoFit/>
           </a:bodyPr>
           <a:lstStyle/>
@@ -8769,10 +9119,11 @@
           </a:fontRef>
         </p:style>
         <p:txBody>
-          <a:bodyPr rtlCol="0" anchor="ctr" wrap="square"/>
+          <a:bodyPr wrap="square" rtlCol="0" anchor="ctr"/>
           <a:lstStyle/>
           <a:p>
             <a:pPr algn="ctr"/>
+            <a:endParaRPr/>
           </a:p>
         </p:txBody>
       </p:sp>
@@ -8813,7 +9164,7 @@
           </a:fontRef>
         </p:style>
         <p:txBody>
-          <a:bodyPr rtlCol="0" anchor="ctr" wrap="none" lIns="0" rIns="0" tIns="0" bIns="0"/>
+          <a:bodyPr wrap="none" lIns="0" tIns="0" rIns="0" bIns="0" rtlCol="0" anchor="ctr"/>
           <a:lstStyle/>
           <a:p>
             <a:pPr algn="ctr">
@@ -8850,7 +9201,7 @@
           <a:noFill/>
         </p:spPr>
         <p:txBody>
-          <a:bodyPr wrap="square" lIns="0" rIns="0" tIns="0" bIns="0">
+          <a:bodyPr wrap="square" lIns="0" tIns="0" rIns="0" bIns="0">
             <a:spAutoFit/>
           </a:bodyPr>
           <a:lstStyle/>
@@ -8905,7 +9256,7 @@
           <a:noFill/>
         </p:spPr>
         <p:txBody>
-          <a:bodyPr wrap="square" lIns="0" rIns="0" tIns="0" bIns="0">
+          <a:bodyPr wrap="square" lIns="0" tIns="0" rIns="0" bIns="0">
             <a:spAutoFit/>
           </a:bodyPr>
           <a:lstStyle/>
@@ -8968,10 +9319,11 @@
           </a:fontRef>
         </p:style>
         <p:txBody>
-          <a:bodyPr rtlCol="0" anchor="ctr" wrap="square"/>
+          <a:bodyPr wrap="square" rtlCol="0" anchor="ctr"/>
           <a:lstStyle/>
           <a:p>
             <a:pPr algn="ctr"/>
+            <a:endParaRPr/>
           </a:p>
         </p:txBody>
       </p:sp>
@@ -9012,7 +9364,7 @@
           </a:fontRef>
         </p:style>
         <p:txBody>
-          <a:bodyPr rtlCol="0" anchor="ctr" wrap="none" lIns="0" rIns="0" tIns="0" bIns="0"/>
+          <a:bodyPr wrap="none" lIns="0" tIns="0" rIns="0" bIns="0" rtlCol="0" anchor="ctr"/>
           <a:lstStyle/>
           <a:p>
             <a:pPr algn="ctr">
@@ -9049,7 +9401,7 @@
           <a:noFill/>
         </p:spPr>
         <p:txBody>
-          <a:bodyPr wrap="square" lIns="0" rIns="0" tIns="0" bIns="0">
+          <a:bodyPr wrap="square" lIns="0" tIns="0" rIns="0" bIns="0">
             <a:spAutoFit/>
           </a:bodyPr>
           <a:lstStyle/>
@@ -9104,7 +9456,7 @@
           <a:noFill/>
         </p:spPr>
         <p:txBody>
-          <a:bodyPr wrap="square" lIns="0" rIns="0" tIns="0" bIns="0">
+          <a:bodyPr wrap="square" lIns="0" tIns="0" rIns="0" bIns="0">
             <a:spAutoFit/>
           </a:bodyPr>
           <a:lstStyle/>
@@ -9167,10 +9519,11 @@
           </a:fontRef>
         </p:style>
         <p:txBody>
-          <a:bodyPr rtlCol="0" anchor="ctr" wrap="square"/>
+          <a:bodyPr wrap="square" rtlCol="0" anchor="ctr"/>
           <a:lstStyle/>
           <a:p>
             <a:pPr algn="ctr"/>
+            <a:endParaRPr/>
           </a:p>
         </p:txBody>
       </p:sp>
@@ -9211,7 +9564,7 @@
           </a:fontRef>
         </p:style>
         <p:txBody>
-          <a:bodyPr rtlCol="0" anchor="ctr" wrap="none" lIns="0" rIns="0" tIns="0" bIns="0"/>
+          <a:bodyPr wrap="none" lIns="0" tIns="0" rIns="0" bIns="0" rtlCol="0" anchor="ctr"/>
           <a:lstStyle/>
           <a:p>
             <a:pPr algn="ctr">
@@ -9248,7 +9601,7 @@
           <a:noFill/>
         </p:spPr>
         <p:txBody>
-          <a:bodyPr wrap="square" lIns="0" rIns="0" tIns="0" bIns="0">
+          <a:bodyPr wrap="square" lIns="0" tIns="0" rIns="0" bIns="0">
             <a:spAutoFit/>
           </a:bodyPr>
           <a:lstStyle/>
@@ -9303,7 +9656,7 @@
           <a:noFill/>
         </p:spPr>
         <p:txBody>
-          <a:bodyPr wrap="square" lIns="0" rIns="0" tIns="0" bIns="0">
+          <a:bodyPr wrap="square" lIns="0" tIns="0" rIns="0" bIns="0">
             <a:spAutoFit/>
           </a:bodyPr>
           <a:lstStyle/>
@@ -9366,10 +9719,11 @@
           </a:fontRef>
         </p:style>
         <p:txBody>
-          <a:bodyPr rtlCol="0" anchor="ctr" wrap="square"/>
+          <a:bodyPr wrap="square" rtlCol="0" anchor="ctr"/>
           <a:lstStyle/>
           <a:p>
             <a:pPr algn="ctr"/>
+            <a:endParaRPr/>
           </a:p>
         </p:txBody>
       </p:sp>
@@ -9410,7 +9764,7 @@
           </a:fontRef>
         </p:style>
         <p:txBody>
-          <a:bodyPr rtlCol="0" anchor="ctr" wrap="none" lIns="0" rIns="0" tIns="0" bIns="0"/>
+          <a:bodyPr wrap="none" lIns="0" tIns="0" rIns="0" bIns="0" rtlCol="0" anchor="ctr"/>
           <a:lstStyle/>
           <a:p>
             <a:pPr algn="ctr">
@@ -9447,7 +9801,7 @@
           <a:noFill/>
         </p:spPr>
         <p:txBody>
-          <a:bodyPr wrap="square" lIns="0" rIns="0" tIns="0" bIns="0">
+          <a:bodyPr wrap="square" lIns="0" tIns="0" rIns="0" bIns="0">
             <a:spAutoFit/>
           </a:bodyPr>
           <a:lstStyle/>
@@ -9526,6 +9880,7 @@
           <a:lstStyle/>
           <a:p>
             <a:pPr algn="ctr"/>
+            <a:endParaRPr/>
           </a:p>
         </p:txBody>
       </p:sp>
@@ -9546,7 +9901,7 @@
           <a:noFill/>
         </p:spPr>
         <p:txBody>
-          <a:bodyPr wrap="square" lIns="0" rIns="0" tIns="0" bIns="0">
+          <a:bodyPr wrap="square" lIns="0" tIns="0" rIns="0" bIns="0">
             <a:spAutoFit/>
           </a:bodyPr>
           <a:lstStyle/>
@@ -9609,6 +9964,7 @@
           <a:lstStyle/>
           <a:p>
             <a:pPr algn="ctr"/>
+            <a:endParaRPr/>
           </a:p>
         </p:txBody>
       </p:sp>
@@ -9629,7 +9985,7 @@
           <a:noFill/>
         </p:spPr>
         <p:txBody>
-          <a:bodyPr wrap="square" lIns="0" rIns="0" tIns="0" bIns="0">
+          <a:bodyPr wrap="square" lIns="0" tIns="0" rIns="0" bIns="0">
             <a:spAutoFit/>
           </a:bodyPr>
           <a:lstStyle/>
@@ -9692,6 +10048,7 @@
           <a:lstStyle/>
           <a:p>
             <a:pPr algn="ctr"/>
+            <a:endParaRPr/>
           </a:p>
         </p:txBody>
       </p:sp>
@@ -9712,7 +10069,7 @@
           <a:noFill/>
         </p:spPr>
         <p:txBody>
-          <a:bodyPr wrap="square" lIns="0" rIns="0" tIns="0" bIns="0">
+          <a:bodyPr wrap="square" lIns="0" tIns="0" rIns="0" bIns="0">
             <a:spAutoFit/>
           </a:bodyPr>
           <a:lstStyle/>
@@ -9773,7 +10130,7 @@
           </a:fontRef>
         </p:style>
         <p:txBody>
-          <a:bodyPr rtlCol="0" anchor="ctr" wrap="square" lIns="209550" tIns="0"/>
+          <a:bodyPr wrap="square" lIns="209550" tIns="0" rtlCol="0" anchor="ctr"/>
           <a:lstStyle/>
           <a:p>
             <a:pPr algn="l">
@@ -9830,10 +10187,11 @@
           </a:fontRef>
         </p:style>
         <p:txBody>
-          <a:bodyPr rtlCol="0" anchor="ctr" wrap="square"/>
+          <a:bodyPr wrap="square" rtlCol="0" anchor="ctr"/>
           <a:lstStyle/>
           <a:p>
             <a:pPr algn="ctr"/>
+            <a:endParaRPr/>
           </a:p>
         </p:txBody>
       </p:sp>
@@ -9846,7 +10204,7 @@
 </file>
 
 <file path=ppt/slides/slide6.xml><?xml version="1.0" encoding="utf-8"?>
-<p:sld xmlns:a="http://schemas.openxmlformats.org/drawingml/2006/main" xmlns:p="http://schemas.openxmlformats.org/presentationml/2006/main" xmlns:r="http://schemas.openxmlformats.org/officeDocument/2006/relationships">
+<p:sld xmlns:a="http://schemas.openxmlformats.org/drawingml/2006/main" xmlns:r="http://schemas.openxmlformats.org/officeDocument/2006/relationships" xmlns:p="http://schemas.openxmlformats.org/presentationml/2006/main">
   <p:cSld>
     <p:spTree>
       <p:nvGrpSpPr>
@@ -9854,7 +10212,14 @@
         <p:cNvGrpSpPr/>
         <p:nvPr/>
       </p:nvGrpSpPr>
-      <p:grpSpPr/>
+      <p:grpSpPr>
+        <a:xfrm>
+          <a:off x="0" y="0"/>
+          <a:ext cx="0" cy="0"/>
+          <a:chOff x="0" y="0"/>
+          <a:chExt cx="0" cy="0"/>
+        </a:xfrm>
+      </p:grpSpPr>
       <p:sp>
         <p:nvSpPr>
           <p:cNvPr id="2" name="TextBox 1"/>
@@ -9872,7 +10237,7 @@
           <a:noFill/>
         </p:spPr>
         <p:txBody>
-          <a:bodyPr wrap="square" lIns="0" rIns="0" tIns="0" bIns="0">
+          <a:bodyPr wrap="square" lIns="0" tIns="0" rIns="0" bIns="0">
             <a:spAutoFit/>
           </a:bodyPr>
           <a:lstStyle/>
@@ -9931,10 +10296,11 @@
           </a:fontRef>
         </p:style>
         <p:txBody>
-          <a:bodyPr rtlCol="0" anchor="ctr" wrap="square"/>
+          <a:bodyPr wrap="square" rtlCol="0" anchor="ctr"/>
           <a:lstStyle/>
           <a:p>
             <a:pPr algn="ctr"/>
+            <a:endParaRPr/>
           </a:p>
         </p:txBody>
       </p:sp>
@@ -9955,7 +10321,7 @@
           <a:noFill/>
         </p:spPr>
         <p:txBody>
-          <a:bodyPr wrap="square" lIns="0" rIns="0" tIns="0" bIns="0">
+          <a:bodyPr wrap="square" lIns="0" tIns="0" rIns="0" bIns="0">
             <a:spAutoFit/>
           </a:bodyPr>
           <a:lstStyle/>
@@ -9994,7 +10360,7 @@
           <a:noFill/>
         </p:spPr>
         <p:txBody>
-          <a:bodyPr wrap="square" lIns="0" rIns="0" tIns="0" bIns="0">
+          <a:bodyPr wrap="square" lIns="0" tIns="0" rIns="0" bIns="0">
             <a:spAutoFit/>
           </a:bodyPr>
           <a:lstStyle/>
@@ -10057,10 +10423,11 @@
           </a:fontRef>
         </p:style>
         <p:txBody>
-          <a:bodyPr rtlCol="0" anchor="ctr" wrap="square"/>
+          <a:bodyPr wrap="square" rtlCol="0" anchor="ctr"/>
           <a:lstStyle/>
           <a:p>
             <a:pPr algn="ctr"/>
+            <a:endParaRPr/>
           </a:p>
         </p:txBody>
       </p:sp>
@@ -10081,7 +10448,7 @@
           <a:noFill/>
         </p:spPr>
         <p:txBody>
-          <a:bodyPr wrap="square" lIns="0" rIns="0" tIns="0" bIns="0">
+          <a:bodyPr wrap="square" lIns="0" tIns="0" rIns="0" bIns="0">
             <a:spAutoFit/>
           </a:bodyPr>
           <a:lstStyle/>
@@ -10176,10 +10543,11 @@
           </a:fontRef>
         </p:style>
         <p:txBody>
-          <a:bodyPr rtlCol="0" anchor="ctr" wrap="square"/>
+          <a:bodyPr wrap="square" rtlCol="0" anchor="ctr"/>
           <a:lstStyle/>
           <a:p>
             <a:pPr algn="ctr"/>
+            <a:endParaRPr/>
           </a:p>
         </p:txBody>
       </p:sp>
@@ -10200,7 +10568,7 @@
           <a:noFill/>
         </p:spPr>
         <p:txBody>
-          <a:bodyPr wrap="square" lIns="0" rIns="0" tIns="0" bIns="0">
+          <a:bodyPr wrap="square" lIns="0" tIns="0" rIns="0" bIns="0">
             <a:spAutoFit/>
           </a:bodyPr>
           <a:lstStyle/>
@@ -10295,10 +10663,11 @@
           </a:fontRef>
         </p:style>
         <p:txBody>
-          <a:bodyPr rtlCol="0" anchor="ctr" wrap="square"/>
+          <a:bodyPr wrap="square" rtlCol="0" anchor="ctr"/>
           <a:lstStyle/>
           <a:p>
             <a:pPr algn="ctr"/>
+            <a:endParaRPr/>
           </a:p>
         </p:txBody>
       </p:sp>
@@ -10319,7 +10688,7 @@
           <a:noFill/>
         </p:spPr>
         <p:txBody>
-          <a:bodyPr wrap="square" lIns="0" rIns="0" tIns="0" bIns="0">
+          <a:bodyPr wrap="square" lIns="0" tIns="0" rIns="0" bIns="0">
             <a:spAutoFit/>
           </a:bodyPr>
           <a:lstStyle/>
@@ -10390,7 +10759,7 @@
           <a:noFill/>
         </p:spPr>
         <p:txBody>
-          <a:bodyPr wrap="square" lIns="0" rIns="0" tIns="0" bIns="0">
+          <a:bodyPr wrap="square" lIns="0" tIns="0" rIns="0" bIns="0">
             <a:spAutoFit/>
           </a:bodyPr>
           <a:lstStyle/>
@@ -10429,7 +10798,7 @@
           <a:noFill/>
         </p:spPr>
         <p:txBody>
-          <a:bodyPr wrap="square" lIns="0" rIns="0" tIns="0" bIns="0">
+          <a:bodyPr wrap="square" lIns="0" tIns="0" rIns="0" bIns="0">
             <a:spAutoFit/>
           </a:bodyPr>
           <a:lstStyle/>
@@ -10488,10 +10857,11 @@
           </a:fontRef>
         </p:style>
         <p:txBody>
-          <a:bodyPr rtlCol="0" anchor="ctr" wrap="square"/>
+          <a:bodyPr wrap="square" rtlCol="0" anchor="ctr"/>
           <a:lstStyle/>
           <a:p>
             <a:pPr algn="ctr"/>
+            <a:endParaRPr/>
           </a:p>
         </p:txBody>
       </p:sp>
@@ -10512,7 +10882,7 @@
           <a:noFill/>
         </p:spPr>
         <p:txBody>
-          <a:bodyPr wrap="square" lIns="0" rIns="0" tIns="0" bIns="0">
+          <a:bodyPr wrap="square" lIns="0" tIns="0" rIns="0" bIns="0">
             <a:spAutoFit/>
           </a:bodyPr>
           <a:lstStyle/>
@@ -10551,7 +10921,7 @@
           <a:noFill/>
         </p:spPr>
         <p:txBody>
-          <a:bodyPr wrap="square" lIns="0" rIns="0" tIns="0" bIns="0">
+          <a:bodyPr wrap="square" lIns="0" tIns="0" rIns="0" bIns="0">
             <a:spAutoFit/>
           </a:bodyPr>
           <a:lstStyle/>
@@ -10610,10 +10980,11 @@
           </a:fontRef>
         </p:style>
         <p:txBody>
-          <a:bodyPr rtlCol="0" anchor="ctr" wrap="square"/>
+          <a:bodyPr wrap="square" rtlCol="0" anchor="ctr"/>
           <a:lstStyle/>
           <a:p>
             <a:pPr algn="ctr"/>
+            <a:endParaRPr/>
           </a:p>
         </p:txBody>
       </p:sp>
@@ -10634,7 +11005,7 @@
           <a:noFill/>
         </p:spPr>
         <p:txBody>
-          <a:bodyPr wrap="square" lIns="0" rIns="0" tIns="0" bIns="0">
+          <a:bodyPr wrap="square" lIns="0" tIns="0" rIns="0" bIns="0">
             <a:spAutoFit/>
           </a:bodyPr>
           <a:lstStyle/>
@@ -10673,7 +11044,7 @@
           <a:noFill/>
         </p:spPr>
         <p:txBody>
-          <a:bodyPr wrap="square" lIns="0" rIns="0" tIns="0" bIns="0">
+          <a:bodyPr wrap="square" lIns="0" tIns="0" rIns="0" bIns="0">
             <a:spAutoFit/>
           </a:bodyPr>
           <a:lstStyle/>
@@ -10732,10 +11103,11 @@
           </a:fontRef>
         </p:style>
         <p:txBody>
-          <a:bodyPr rtlCol="0" anchor="ctr" wrap="square"/>
+          <a:bodyPr wrap="square" rtlCol="0" anchor="ctr"/>
           <a:lstStyle/>
           <a:p>
             <a:pPr algn="ctr"/>
+            <a:endParaRPr/>
           </a:p>
         </p:txBody>
       </p:sp>
@@ -10756,7 +11128,7 @@
           <a:noFill/>
         </p:spPr>
         <p:txBody>
-          <a:bodyPr wrap="square" lIns="0" rIns="0" tIns="0" bIns="0">
+          <a:bodyPr wrap="square" lIns="0" tIns="0" rIns="0" bIns="0">
             <a:spAutoFit/>
           </a:bodyPr>
           <a:lstStyle/>
@@ -10795,7 +11167,7 @@
           <a:noFill/>
         </p:spPr>
         <p:txBody>
-          <a:bodyPr wrap="square" lIns="0" rIns="0" tIns="0" bIns="0">
+          <a:bodyPr wrap="square" lIns="0" tIns="0" rIns="0" bIns="0">
             <a:spAutoFit/>
           </a:bodyPr>
           <a:lstStyle/>
@@ -10856,7 +11228,7 @@
           </a:fontRef>
         </p:style>
         <p:txBody>
-          <a:bodyPr rtlCol="0" anchor="ctr" wrap="square" lIns="209550" tIns="0"/>
+          <a:bodyPr wrap="square" lIns="209550" tIns="0" rtlCol="0" anchor="ctr"/>
           <a:lstStyle/>
           <a:p>
             <a:pPr algn="l">
@@ -10913,10 +11285,11 @@
           </a:fontRef>
         </p:style>
         <p:txBody>
-          <a:bodyPr rtlCol="0" anchor="ctr" wrap="square"/>
+          <a:bodyPr wrap="square" rtlCol="0" anchor="ctr"/>
           <a:lstStyle/>
           <a:p>
             <a:pPr algn="ctr"/>
+            <a:endParaRPr/>
           </a:p>
         </p:txBody>
       </p:sp>
@@ -10929,7 +11302,7 @@
 </file>
 
 <file path=ppt/slides/slide7.xml><?xml version="1.0" encoding="utf-8"?>
-<p:sld xmlns:a="http://schemas.openxmlformats.org/drawingml/2006/main" xmlns:p="http://schemas.openxmlformats.org/presentationml/2006/main" xmlns:r="http://schemas.openxmlformats.org/officeDocument/2006/relationships">
+<p:sld xmlns:a="http://schemas.openxmlformats.org/drawingml/2006/main" xmlns:r="http://schemas.openxmlformats.org/officeDocument/2006/relationships" xmlns:p="http://schemas.openxmlformats.org/presentationml/2006/main">
   <p:cSld>
     <p:spTree>
       <p:nvGrpSpPr>
@@ -10937,7 +11310,14 @@
         <p:cNvGrpSpPr/>
         <p:nvPr/>
       </p:nvGrpSpPr>
-      <p:grpSpPr/>
+      <p:grpSpPr>
+        <a:xfrm>
+          <a:off x="0" y="0"/>
+          <a:ext cx="0" cy="0"/>
+          <a:chOff x="0" y="0"/>
+          <a:chExt cx="0" cy="0"/>
+        </a:xfrm>
+      </p:grpSpPr>
       <p:sp>
         <p:nvSpPr>
           <p:cNvPr id="2" name="TextBox 1"/>
@@ -10955,7 +11335,7 @@
           <a:noFill/>
         </p:spPr>
         <p:txBody>
-          <a:bodyPr wrap="square" lIns="0" rIns="0" tIns="0" bIns="0">
+          <a:bodyPr wrap="square" lIns="0" tIns="0" rIns="0" bIns="0">
             <a:spAutoFit/>
           </a:bodyPr>
           <a:lstStyle/>
@@ -11014,10 +11394,11 @@
           </a:fontRef>
         </p:style>
         <p:txBody>
-          <a:bodyPr rtlCol="0" anchor="ctr" wrap="square"/>
+          <a:bodyPr wrap="square" rtlCol="0" anchor="ctr"/>
           <a:lstStyle/>
           <a:p>
             <a:pPr algn="ctr"/>
+            <a:endParaRPr/>
           </a:p>
         </p:txBody>
       </p:sp>
@@ -11038,7 +11419,7 @@
           <a:noFill/>
         </p:spPr>
         <p:txBody>
-          <a:bodyPr wrap="square" lIns="0" rIns="0" tIns="0" bIns="0">
+          <a:bodyPr wrap="square" lIns="0" tIns="0" rIns="0" bIns="0">
             <a:spAutoFit/>
           </a:bodyPr>
           <a:lstStyle/>
@@ -11077,7 +11458,7 @@
           <a:noFill/>
         </p:spPr>
         <p:txBody>
-          <a:bodyPr wrap="square" lIns="0" rIns="0" tIns="0" bIns="0">
+          <a:bodyPr wrap="square" lIns="0" tIns="0" rIns="0" bIns="0">
             <a:spAutoFit/>
           </a:bodyPr>
           <a:lstStyle/>
@@ -11140,6 +11521,7 @@
           <a:lstStyle/>
           <a:p>
             <a:pPr algn="ctr"/>
+            <a:endParaRPr/>
           </a:p>
         </p:txBody>
       </p:sp>
@@ -11160,7 +11542,7 @@
           <a:noFill/>
         </p:spPr>
         <p:txBody>
-          <a:bodyPr wrap="square" lIns="0" rIns="0" tIns="0" bIns="0">
+          <a:bodyPr wrap="square" lIns="0" tIns="0" rIns="0" bIns="0">
             <a:spAutoFit/>
           </a:bodyPr>
           <a:lstStyle/>
@@ -11223,6 +11605,7 @@
           <a:lstStyle/>
           <a:p>
             <a:pPr algn="ctr"/>
+            <a:endParaRPr/>
           </a:p>
         </p:txBody>
       </p:sp>
@@ -11243,7 +11626,7 @@
           <a:noFill/>
         </p:spPr>
         <p:txBody>
-          <a:bodyPr wrap="square" lIns="0" rIns="0" tIns="0" bIns="0">
+          <a:bodyPr wrap="square" lIns="0" tIns="0" rIns="0" bIns="0">
             <a:spAutoFit/>
           </a:bodyPr>
           <a:lstStyle/>
@@ -11306,6 +11689,7 @@
           <a:lstStyle/>
           <a:p>
             <a:pPr algn="ctr"/>
+            <a:endParaRPr/>
           </a:p>
         </p:txBody>
       </p:sp>
@@ -11326,7 +11710,7 @@
           <a:noFill/>
         </p:spPr>
         <p:txBody>
-          <a:bodyPr wrap="square" lIns="0" rIns="0" tIns="0" bIns="0">
+          <a:bodyPr wrap="square" lIns="0" tIns="0" rIns="0" bIns="0">
             <a:spAutoFit/>
           </a:bodyPr>
           <a:lstStyle/>
@@ -11389,6 +11773,7 @@
           <a:lstStyle/>
           <a:p>
             <a:pPr algn="ctr"/>
+            <a:endParaRPr/>
           </a:p>
         </p:txBody>
       </p:sp>
@@ -11409,7 +11794,7 @@
           <a:noFill/>
         </p:spPr>
         <p:txBody>
-          <a:bodyPr wrap="square" lIns="0" rIns="0" tIns="0" bIns="0">
+          <a:bodyPr wrap="square" lIns="0" tIns="0" rIns="0" bIns="0">
             <a:spAutoFit/>
           </a:bodyPr>
           <a:lstStyle/>
@@ -11472,6 +11857,7 @@
           <a:lstStyle/>
           <a:p>
             <a:pPr algn="ctr"/>
+            <a:endParaRPr/>
           </a:p>
         </p:txBody>
       </p:sp>
@@ -11492,7 +11878,7 @@
           <a:noFill/>
         </p:spPr>
         <p:txBody>
-          <a:bodyPr wrap="square" lIns="0" rIns="0" tIns="0" bIns="0">
+          <a:bodyPr wrap="square" lIns="0" tIns="0" rIns="0" bIns="0">
             <a:spAutoFit/>
           </a:bodyPr>
           <a:lstStyle/>
@@ -11523,7 +11909,7 @@
           <p:nvPr/>
         </p:nvPicPr>
         <p:blipFill>
-          <a:blip r:embed="rId2"/>
+          <a:blip r:embed="rId3"/>
           <a:stretch>
             <a:fillRect/>
           </a:stretch>
@@ -11577,7 +11963,7 @@
           </a:fontRef>
         </p:style>
         <p:txBody>
-          <a:bodyPr rtlCol="0" anchor="ctr" wrap="square" lIns="209550" tIns="0"/>
+          <a:bodyPr wrap="square" lIns="209550" tIns="0" rtlCol="0" anchor="ctr"/>
           <a:lstStyle/>
           <a:p>
             <a:pPr algn="l">
@@ -11634,10 +12020,11 @@
           </a:fontRef>
         </p:style>
         <p:txBody>
-          <a:bodyPr rtlCol="0" anchor="ctr" wrap="square"/>
+          <a:bodyPr wrap="square" rtlCol="0" anchor="ctr"/>
           <a:lstStyle/>
           <a:p>
             <a:pPr algn="ctr"/>
+            <a:endParaRPr/>
           </a:p>
         </p:txBody>
       </p:sp>
@@ -11650,7 +12037,7 @@
 </file>
 
 <file path=ppt/slides/slide8.xml><?xml version="1.0" encoding="utf-8"?>
-<p:sld xmlns:a="http://schemas.openxmlformats.org/drawingml/2006/main" xmlns:p="http://schemas.openxmlformats.org/presentationml/2006/main" xmlns:r="http://schemas.openxmlformats.org/officeDocument/2006/relationships">
+<p:sld xmlns:a="http://schemas.openxmlformats.org/drawingml/2006/main" xmlns:r="http://schemas.openxmlformats.org/officeDocument/2006/relationships" xmlns:p="http://schemas.openxmlformats.org/presentationml/2006/main">
   <p:cSld>
     <p:spTree>
       <p:nvGrpSpPr>
@@ -11658,7 +12045,14 @@
         <p:cNvGrpSpPr/>
         <p:nvPr/>
       </p:nvGrpSpPr>
-      <p:grpSpPr/>
+      <p:grpSpPr>
+        <a:xfrm>
+          <a:off x="0" y="0"/>
+          <a:ext cx="0" cy="0"/>
+          <a:chOff x="0" y="0"/>
+          <a:chExt cx="0" cy="0"/>
+        </a:xfrm>
+      </p:grpSpPr>
       <p:sp>
         <p:nvSpPr>
           <p:cNvPr id="2" name="TextBox 1"/>
@@ -11676,7 +12070,7 @@
           <a:noFill/>
         </p:spPr>
         <p:txBody>
-          <a:bodyPr wrap="square" lIns="0" rIns="0" tIns="0" bIns="0">
+          <a:bodyPr wrap="square" lIns="0" tIns="0" rIns="0" bIns="0">
             <a:spAutoFit/>
           </a:bodyPr>
           <a:lstStyle/>
@@ -11735,10 +12129,11 @@
           </a:fontRef>
         </p:style>
         <p:txBody>
-          <a:bodyPr rtlCol="0" anchor="ctr" wrap="square"/>
+          <a:bodyPr wrap="square" rtlCol="0" anchor="ctr"/>
           <a:lstStyle/>
           <a:p>
             <a:pPr algn="ctr"/>
+            <a:endParaRPr/>
           </a:p>
         </p:txBody>
       </p:sp>
@@ -11759,7 +12154,7 @@
           <a:noFill/>
         </p:spPr>
         <p:txBody>
-          <a:bodyPr wrap="square" lIns="0" rIns="0" tIns="0" bIns="0">
+          <a:bodyPr wrap="square" lIns="0" tIns="0" rIns="0" bIns="0">
             <a:spAutoFit/>
           </a:bodyPr>
           <a:lstStyle/>
@@ -11798,7 +12193,7 @@
           <a:noFill/>
         </p:spPr>
         <p:txBody>
-          <a:bodyPr wrap="square" lIns="0" rIns="0" tIns="0" bIns="0">
+          <a:bodyPr wrap="square" lIns="0" tIns="0" rIns="0" bIns="0">
             <a:spAutoFit/>
           </a:bodyPr>
           <a:lstStyle/>
@@ -11861,10 +12256,11 @@
           </a:fontRef>
         </p:style>
         <p:txBody>
-          <a:bodyPr rtlCol="0" anchor="ctr" wrap="square"/>
+          <a:bodyPr wrap="square" rtlCol="0" anchor="ctr"/>
           <a:lstStyle/>
           <a:p>
             <a:pPr algn="ctr"/>
+            <a:endParaRPr/>
           </a:p>
         </p:txBody>
       </p:sp>
@@ -11885,7 +12281,7 @@
           <a:noFill/>
         </p:spPr>
         <p:txBody>
-          <a:bodyPr wrap="square" lIns="0" rIns="0" tIns="0" bIns="0">
+          <a:bodyPr wrap="square" lIns="0" tIns="0" rIns="0" bIns="0">
             <a:spAutoFit/>
           </a:bodyPr>
           <a:lstStyle/>
@@ -11964,10 +12360,11 @@
           </a:fontRef>
         </p:style>
         <p:txBody>
-          <a:bodyPr rtlCol="0" anchor="ctr" wrap="square"/>
+          <a:bodyPr wrap="square" rtlCol="0" anchor="ctr"/>
           <a:lstStyle/>
           <a:p>
             <a:pPr algn="ctr"/>
+            <a:endParaRPr/>
           </a:p>
         </p:txBody>
       </p:sp>
@@ -11988,7 +12385,7 @@
           <a:noFill/>
         </p:spPr>
         <p:txBody>
-          <a:bodyPr wrap="square" lIns="0" rIns="0" tIns="0" bIns="0">
+          <a:bodyPr wrap="square" lIns="0" tIns="0" rIns="0" bIns="0">
             <a:spAutoFit/>
           </a:bodyPr>
           <a:lstStyle/>
@@ -12067,10 +12464,11 @@
           </a:fontRef>
         </p:style>
         <p:txBody>
-          <a:bodyPr rtlCol="0" anchor="ctr" wrap="square"/>
+          <a:bodyPr wrap="square" rtlCol="0" anchor="ctr"/>
           <a:lstStyle/>
           <a:p>
             <a:pPr algn="ctr"/>
+            <a:endParaRPr/>
           </a:p>
         </p:txBody>
       </p:sp>
@@ -12091,7 +12489,7 @@
           <a:noFill/>
         </p:spPr>
         <p:txBody>
-          <a:bodyPr wrap="square" lIns="0" rIns="0" tIns="0" bIns="0">
+          <a:bodyPr wrap="square" lIns="0" tIns="0" rIns="0" bIns="0">
             <a:spAutoFit/>
           </a:bodyPr>
           <a:lstStyle/>
@@ -12170,10 +12568,11 @@
           </a:fontRef>
         </p:style>
         <p:txBody>
-          <a:bodyPr rtlCol="0" anchor="ctr" wrap="square"/>
+          <a:bodyPr wrap="square" rtlCol="0" anchor="ctr"/>
           <a:lstStyle/>
           <a:p>
             <a:pPr algn="ctr"/>
+            <a:endParaRPr/>
           </a:p>
         </p:txBody>
       </p:sp>
@@ -12194,7 +12593,7 @@
           <a:noFill/>
         </p:spPr>
         <p:txBody>
-          <a:bodyPr wrap="square" lIns="0" rIns="0" tIns="0" bIns="0">
+          <a:bodyPr wrap="square" lIns="0" tIns="0" rIns="0" bIns="0">
             <a:spAutoFit/>
           </a:bodyPr>
           <a:lstStyle/>
@@ -12273,10 +12672,11 @@
           </a:fontRef>
         </p:style>
         <p:txBody>
-          <a:bodyPr rtlCol="0" anchor="ctr" wrap="square"/>
+          <a:bodyPr wrap="square" rtlCol="0" anchor="ctr"/>
           <a:lstStyle/>
           <a:p>
             <a:pPr algn="ctr"/>
+            <a:endParaRPr/>
           </a:p>
         </p:txBody>
       </p:sp>
@@ -12297,7 +12697,7 @@
           <a:noFill/>
         </p:spPr>
         <p:txBody>
-          <a:bodyPr wrap="square" lIns="0" rIns="0" tIns="0" bIns="0">
+          <a:bodyPr wrap="square" lIns="0" tIns="0" rIns="0" bIns="0">
             <a:spAutoFit/>
           </a:bodyPr>
           <a:lstStyle/>
@@ -12376,10 +12776,11 @@
           </a:fontRef>
         </p:style>
         <p:txBody>
-          <a:bodyPr rtlCol="0" anchor="ctr" wrap="square"/>
+          <a:bodyPr wrap="square" rtlCol="0" anchor="ctr"/>
           <a:lstStyle/>
           <a:p>
             <a:pPr algn="ctr"/>
+            <a:endParaRPr/>
           </a:p>
         </p:txBody>
       </p:sp>
@@ -12400,7 +12801,7 @@
           <a:noFill/>
         </p:spPr>
         <p:txBody>
-          <a:bodyPr wrap="square" lIns="0" rIns="0" tIns="0" bIns="0">
+          <a:bodyPr wrap="square" lIns="0" tIns="0" rIns="0" bIns="0">
             <a:spAutoFit/>
           </a:bodyPr>
           <a:lstStyle/>
@@ -12479,6 +12880,7 @@
           <a:lstStyle/>
           <a:p>
             <a:pPr algn="ctr"/>
+            <a:endParaRPr/>
           </a:p>
         </p:txBody>
       </p:sp>
@@ -12499,7 +12901,7 @@
           <a:noFill/>
         </p:spPr>
         <p:txBody>
-          <a:bodyPr wrap="square" lIns="0" rIns="0" tIns="0" bIns="0">
+          <a:bodyPr wrap="square" lIns="0" tIns="0" rIns="0" bIns="0">
             <a:spAutoFit/>
           </a:bodyPr>
           <a:lstStyle/>
@@ -12562,6 +12964,7 @@
           <a:lstStyle/>
           <a:p>
             <a:pPr algn="ctr"/>
+            <a:endParaRPr/>
           </a:p>
         </p:txBody>
       </p:sp>
@@ -12582,7 +12985,7 @@
           <a:noFill/>
         </p:spPr>
         <p:txBody>
-          <a:bodyPr wrap="square" lIns="0" rIns="0" tIns="0" bIns="0">
+          <a:bodyPr wrap="square" lIns="0" tIns="0" rIns="0" bIns="0">
             <a:spAutoFit/>
           </a:bodyPr>
           <a:lstStyle/>
@@ -12643,7 +13046,7 @@
           </a:fontRef>
         </p:style>
         <p:txBody>
-          <a:bodyPr rtlCol="0" anchor="ctr" wrap="square" lIns="209550" tIns="0"/>
+          <a:bodyPr wrap="square" lIns="209550" tIns="0" rtlCol="0" anchor="ctr"/>
           <a:lstStyle/>
           <a:p>
             <a:pPr algn="l">
@@ -12700,10 +13103,11 @@
           </a:fontRef>
         </p:style>
         <p:txBody>
-          <a:bodyPr rtlCol="0" anchor="ctr" wrap="square"/>
+          <a:bodyPr wrap="square" rtlCol="0" anchor="ctr"/>
           <a:lstStyle/>
           <a:p>
             <a:pPr algn="ctr"/>
+            <a:endParaRPr/>
           </a:p>
         </p:txBody>
       </p:sp>
@@ -12716,7 +13120,7 @@
 </file>
 
 <file path=ppt/slides/slide9.xml><?xml version="1.0" encoding="utf-8"?>
-<p:sld xmlns:a="http://schemas.openxmlformats.org/drawingml/2006/main" xmlns:p="http://schemas.openxmlformats.org/presentationml/2006/main" xmlns:r="http://schemas.openxmlformats.org/officeDocument/2006/relationships">
+<p:sld xmlns:a="http://schemas.openxmlformats.org/drawingml/2006/main" xmlns:r="http://schemas.openxmlformats.org/officeDocument/2006/relationships" xmlns:p="http://schemas.openxmlformats.org/presentationml/2006/main">
   <p:cSld>
     <p:spTree>
       <p:nvGrpSpPr>
@@ -12724,7 +13128,14 @@
         <p:cNvGrpSpPr/>
         <p:nvPr/>
       </p:nvGrpSpPr>
-      <p:grpSpPr/>
+      <p:grpSpPr>
+        <a:xfrm>
+          <a:off x="0" y="0"/>
+          <a:ext cx="0" cy="0"/>
+          <a:chOff x="0" y="0"/>
+          <a:chExt cx="0" cy="0"/>
+        </a:xfrm>
+      </p:grpSpPr>
       <p:sp>
         <p:nvSpPr>
           <p:cNvPr id="2" name="TextBox 1"/>
@@ -12742,7 +13153,7 @@
           <a:noFill/>
         </p:spPr>
         <p:txBody>
-          <a:bodyPr wrap="square" lIns="0" rIns="0" tIns="0" bIns="0">
+          <a:bodyPr wrap="square" lIns="0" tIns="0" rIns="0" bIns="0">
             <a:spAutoFit/>
           </a:bodyPr>
           <a:lstStyle/>
@@ -12801,10 +13212,11 @@
           </a:fontRef>
         </p:style>
         <p:txBody>
-          <a:bodyPr rtlCol="0" anchor="ctr" wrap="square"/>
+          <a:bodyPr wrap="square" rtlCol="0" anchor="ctr"/>
           <a:lstStyle/>
           <a:p>
             <a:pPr algn="ctr"/>
+            <a:endParaRPr/>
           </a:p>
         </p:txBody>
       </p:sp>
@@ -12825,7 +13237,7 @@
           <a:noFill/>
         </p:spPr>
         <p:txBody>
-          <a:bodyPr wrap="square" lIns="0" rIns="0" tIns="0" bIns="0">
+          <a:bodyPr wrap="square" lIns="0" tIns="0" rIns="0" bIns="0">
             <a:spAutoFit/>
           </a:bodyPr>
           <a:lstStyle/>
@@ -12864,7 +13276,7 @@
           <a:noFill/>
         </p:spPr>
         <p:txBody>
-          <a:bodyPr wrap="square" lIns="0" rIns="0" tIns="0" bIns="0">
+          <a:bodyPr wrap="square" lIns="0" tIns="0" rIns="0" bIns="0">
             <a:spAutoFit/>
           </a:bodyPr>
           <a:lstStyle/>
@@ -12923,10 +13335,11 @@
           </a:fontRef>
         </p:style>
         <p:txBody>
-          <a:bodyPr rtlCol="0" anchor="ctr" wrap="square"/>
+          <a:bodyPr wrap="square" rtlCol="0" anchor="ctr"/>
           <a:lstStyle/>
           <a:p>
             <a:pPr algn="ctr"/>
+            <a:endParaRPr/>
           </a:p>
         </p:txBody>
       </p:sp>
@@ -12973,6 +13386,7 @@
           <a:lstStyle/>
           <a:p>
             <a:pPr algn="ctr"/>
+            <a:endParaRPr/>
           </a:p>
         </p:txBody>
       </p:sp>
@@ -12993,7 +13407,7 @@
           <a:noFill/>
         </p:spPr>
         <p:txBody>
-          <a:bodyPr wrap="square" lIns="0" rIns="0" tIns="0" bIns="0">
+          <a:bodyPr wrap="square" lIns="0" tIns="0" rIns="0" bIns="0">
             <a:spAutoFit/>
           </a:bodyPr>
           <a:lstStyle/>
@@ -13084,10 +13498,11 @@
           </a:fontRef>
         </p:style>
         <p:txBody>
-          <a:bodyPr rtlCol="0" anchor="ctr" wrap="square"/>
+          <a:bodyPr wrap="square" rtlCol="0" anchor="ctr"/>
           <a:lstStyle/>
           <a:p>
             <a:pPr algn="ctr"/>
+            <a:endParaRPr/>
           </a:p>
         </p:txBody>
       </p:sp>
@@ -13134,6 +13549,7 @@
           <a:lstStyle/>
           <a:p>
             <a:pPr algn="ctr"/>
+            <a:endParaRPr/>
           </a:p>
         </p:txBody>
       </p:sp>
@@ -13154,7 +13570,7 @@
           <a:noFill/>
         </p:spPr>
         <p:txBody>
-          <a:bodyPr wrap="square" lIns="0" rIns="0" tIns="0" bIns="0">
+          <a:bodyPr wrap="square" lIns="0" tIns="0" rIns="0" bIns="0">
             <a:spAutoFit/>
           </a:bodyPr>
           <a:lstStyle/>
@@ -13245,10 +13661,11 @@
           </a:fontRef>
         </p:style>
         <p:txBody>
-          <a:bodyPr rtlCol="0" anchor="ctr" wrap="square"/>
+          <a:bodyPr wrap="square" rtlCol="0" anchor="ctr"/>
           <a:lstStyle/>
           <a:p>
             <a:pPr algn="ctr"/>
+            <a:endParaRPr/>
           </a:p>
         </p:txBody>
       </p:sp>
@@ -13295,6 +13712,7 @@
           <a:lstStyle/>
           <a:p>
             <a:pPr algn="ctr"/>
+            <a:endParaRPr/>
           </a:p>
         </p:txBody>
       </p:sp>
@@ -13315,7 +13733,7 @@
           <a:noFill/>
         </p:spPr>
         <p:txBody>
-          <a:bodyPr wrap="square" lIns="0" rIns="0" tIns="0" bIns="0">
+          <a:bodyPr wrap="square" lIns="0" tIns="0" rIns="0" bIns="0">
             <a:spAutoFit/>
           </a:bodyPr>
           <a:lstStyle/>
@@ -13410,6 +13828,7 @@
           <a:lstStyle/>
           <a:p>
             <a:pPr algn="ctr"/>
+            <a:endParaRPr/>
           </a:p>
         </p:txBody>
       </p:sp>
@@ -13430,7 +13849,7 @@
           <a:noFill/>
         </p:spPr>
         <p:txBody>
-          <a:bodyPr wrap="square" lIns="0" rIns="0" tIns="0" bIns="0">
+          <a:bodyPr wrap="square" lIns="0" tIns="0" rIns="0" bIns="0">
             <a:spAutoFit/>
           </a:bodyPr>
           <a:lstStyle/>
@@ -13493,6 +13912,7 @@
           <a:lstStyle/>
           <a:p>
             <a:pPr algn="ctr"/>
+            <a:endParaRPr/>
           </a:p>
         </p:txBody>
       </p:sp>
@@ -13513,7 +13933,7 @@
           <a:noFill/>
         </p:spPr>
         <p:txBody>
-          <a:bodyPr wrap="square" lIns="0" rIns="0" tIns="0" bIns="0">
+          <a:bodyPr wrap="square" lIns="0" tIns="0" rIns="0" bIns="0">
             <a:spAutoFit/>
           </a:bodyPr>
           <a:lstStyle/>
@@ -13576,6 +13996,7 @@
           <a:lstStyle/>
           <a:p>
             <a:pPr algn="ctr"/>
+            <a:endParaRPr/>
           </a:p>
         </p:txBody>
       </p:sp>
@@ -13596,7 +14017,7 @@
           <a:noFill/>
         </p:spPr>
         <p:txBody>
-          <a:bodyPr wrap="square" lIns="0" rIns="0" tIns="0" bIns="0">
+          <a:bodyPr wrap="square" lIns="0" tIns="0" rIns="0" bIns="0">
             <a:spAutoFit/>
           </a:bodyPr>
           <a:lstStyle/>
@@ -13659,6 +14080,7 @@
           <a:lstStyle/>
           <a:p>
             <a:pPr algn="ctr"/>
+            <a:endParaRPr/>
           </a:p>
         </p:txBody>
       </p:sp>
@@ -13679,7 +14101,7 @@
           <a:noFill/>
         </p:spPr>
         <p:txBody>
-          <a:bodyPr wrap="square" lIns="0" rIns="0" tIns="0" bIns="0">
+          <a:bodyPr wrap="square" lIns="0" tIns="0" rIns="0" bIns="0">
             <a:spAutoFit/>
           </a:bodyPr>
           <a:lstStyle/>
@@ -13740,7 +14162,7 @@
           </a:fontRef>
         </p:style>
         <p:txBody>
-          <a:bodyPr rtlCol="0" anchor="ctr" wrap="square" lIns="209550" tIns="0"/>
+          <a:bodyPr wrap="square" lIns="209550" tIns="0" rtlCol="0" anchor="ctr"/>
           <a:lstStyle/>
           <a:p>
             <a:pPr algn="l">
@@ -13797,10 +14219,11 @@
           </a:fontRef>
         </p:style>
         <p:txBody>
-          <a:bodyPr rtlCol="0" anchor="ctr" wrap="square"/>
+          <a:bodyPr wrap="square" rtlCol="0" anchor="ctr"/>
           <a:lstStyle/>
           <a:p>
             <a:pPr algn="ctr"/>
+            <a:endParaRPr/>
           </a:p>
         </p:txBody>
       </p:sp>
@@ -14133,9 +14556,9 @@
 </file>
 
 <file path=ppt/theme/theme2.xml><?xml version="1.0" encoding="utf-8"?>
-<a:theme xmlns:a="http://schemas.openxmlformats.org/drawingml/2006/main" name="Office Theme">
+<a:theme xmlns:a="http://schemas.openxmlformats.org/drawingml/2006/main" name="Motyw pakietu Office">
   <a:themeElements>
-    <a:clrScheme name="Office">
+    <a:clrScheme name="Pakiet Office">
       <a:dk1>
         <a:sysClr val="windowText" lastClr="000000"/>
       </a:dk1>
@@ -14143,44 +14566,44 @@
         <a:sysClr val="window" lastClr="FFFFFF"/>
       </a:lt1>
       <a:dk2>
-        <a:srgbClr val="1F497D"/>
+        <a:srgbClr val="0E2841"/>
       </a:dk2>
       <a:lt2>
-        <a:srgbClr val="EEECE1"/>
+        <a:srgbClr val="E8E8E8"/>
       </a:lt2>
       <a:accent1>
-        <a:srgbClr val="4F81BD"/>
+        <a:srgbClr val="156082"/>
       </a:accent1>
       <a:accent2>
-        <a:srgbClr val="C0504D"/>
+        <a:srgbClr val="E97132"/>
       </a:accent2>
       <a:accent3>
-        <a:srgbClr val="9BBB59"/>
+        <a:srgbClr val="196B24"/>
       </a:accent3>
       <a:accent4>
-        <a:srgbClr val="8064A2"/>
+        <a:srgbClr val="0F9ED5"/>
       </a:accent4>
       <a:accent5>
-        <a:srgbClr val="4BACC6"/>
+        <a:srgbClr val="A02B93"/>
       </a:accent5>
       <a:accent6>
-        <a:srgbClr val="F79646"/>
+        <a:srgbClr val="4EA72E"/>
       </a:accent6>
       <a:hlink>
-        <a:srgbClr val="0000FF"/>
+        <a:srgbClr val="467886"/>
       </a:hlink>
       <a:folHlink>
-        <a:srgbClr val="800080"/>
+        <a:srgbClr val="96607D"/>
       </a:folHlink>
     </a:clrScheme>
-    <a:fontScheme name="Office">
+    <a:fontScheme name="Pakiet Office">
       <a:majorFont>
-        <a:latin typeface="Calibri"/>
+        <a:latin typeface="Aptos Display" panose="02110004020202020204"/>
         <a:ea typeface=""/>
         <a:cs typeface=""/>
-        <a:font script="Jpan" typeface="ＭＳ Ｐゴシック"/>
+        <a:font script="Jpan" typeface="游ゴシック Light"/>
         <a:font script="Hang" typeface="맑은 고딕"/>
-        <a:font script="Hans" typeface="宋体"/>
+        <a:font script="Hans" typeface="等线 Light"/>
         <a:font script="Hant" typeface="新細明體"/>
         <a:font script="Arab" typeface="Times New Roman"/>
         <a:font script="Hebr" typeface="Times New Roman"/>
@@ -14208,14 +14631,31 @@
         <a:font script="Viet" typeface="Times New Roman"/>
         <a:font script="Uigh" typeface="Microsoft Uighur"/>
         <a:font script="Geor" typeface="Sylfaen"/>
+        <a:font script="Armn" typeface="Arial"/>
+        <a:font script="Bugi" typeface="Leelawadee UI"/>
+        <a:font script="Bopo" typeface="Microsoft JhengHei"/>
+        <a:font script="Java" typeface="Javanese Text"/>
+        <a:font script="Lisu" typeface="Segoe UI"/>
+        <a:font script="Mymr" typeface="Myanmar Text"/>
+        <a:font script="Nkoo" typeface="Ebrima"/>
+        <a:font script="Olck" typeface="Nirmala UI"/>
+        <a:font script="Osma" typeface="Ebrima"/>
+        <a:font script="Phag" typeface="Phagspa"/>
+        <a:font script="Syrn" typeface="Estrangelo Edessa"/>
+        <a:font script="Syrj" typeface="Estrangelo Edessa"/>
+        <a:font script="Syre" typeface="Estrangelo Edessa"/>
+        <a:font script="Sora" typeface="Nirmala UI"/>
+        <a:font script="Tale" typeface="Microsoft Tai Le"/>
+        <a:font script="Talu" typeface="Microsoft New Tai Lue"/>
+        <a:font script="Tfng" typeface="Ebrima"/>
       </a:majorFont>
       <a:minorFont>
-        <a:latin typeface="Calibri"/>
+        <a:latin typeface="Aptos" panose="02110004020202020204"/>
         <a:ea typeface=""/>
         <a:cs typeface=""/>
-        <a:font script="Jpan" typeface="ＭＳ Ｐゴシック"/>
+        <a:font script="Jpan" typeface="游ゴシック"/>
         <a:font script="Hang" typeface="맑은 고딕"/>
-        <a:font script="Hans" typeface="宋体"/>
+        <a:font script="Hans" typeface="等线"/>
         <a:font script="Hant" typeface="新細明體"/>
         <a:font script="Arab" typeface="Arial"/>
         <a:font script="Hebr" typeface="Arial"/>
@@ -14243,9 +14683,26 @@
         <a:font script="Viet" typeface="Arial"/>
         <a:font script="Uigh" typeface="Microsoft Uighur"/>
         <a:font script="Geor" typeface="Sylfaen"/>
+        <a:font script="Armn" typeface="Arial"/>
+        <a:font script="Bugi" typeface="Leelawadee UI"/>
+        <a:font script="Bopo" typeface="Microsoft JhengHei"/>
+        <a:font script="Java" typeface="Javanese Text"/>
+        <a:font script="Lisu" typeface="Segoe UI"/>
+        <a:font script="Mymr" typeface="Myanmar Text"/>
+        <a:font script="Nkoo" typeface="Ebrima"/>
+        <a:font script="Olck" typeface="Nirmala UI"/>
+        <a:font script="Osma" typeface="Ebrima"/>
+        <a:font script="Phag" typeface="Phagspa"/>
+        <a:font script="Syrn" typeface="Estrangelo Edessa"/>
+        <a:font script="Syrj" typeface="Estrangelo Edessa"/>
+        <a:font script="Syre" typeface="Estrangelo Edessa"/>
+        <a:font script="Sora" typeface="Nirmala UI"/>
+        <a:font script="Tale" typeface="Microsoft Tai Le"/>
+        <a:font script="Talu" typeface="Microsoft New Tai Lue"/>
+        <a:font script="Tfng" typeface="Ebrima"/>
       </a:minorFont>
     </a:fontScheme>
-    <a:fmtScheme name="Office">
+    <a:fmtScheme name="Pakiet Office">
       <a:fillStyleLst>
         <a:solidFill>
           <a:schemeClr val="phClr"/>
@@ -14254,180 +14711,136 @@
           <a:gsLst>
             <a:gs pos="0">
               <a:schemeClr val="phClr">
-                <a:tint val="50000"/>
-                <a:satMod val="300000"/>
+                <a:lumMod val="110000"/>
+                <a:satMod val="105000"/>
+                <a:tint val="67000"/>
               </a:schemeClr>
             </a:gs>
-            <a:gs pos="35000">
+            <a:gs pos="50000">
               <a:schemeClr val="phClr">
-                <a:tint val="37000"/>
-                <a:satMod val="300000"/>
+                <a:lumMod val="105000"/>
+                <a:satMod val="103000"/>
+                <a:tint val="73000"/>
               </a:schemeClr>
             </a:gs>
             <a:gs pos="100000">
               <a:schemeClr val="phClr">
-                <a:tint val="15000"/>
-                <a:satMod val="350000"/>
+                <a:lumMod val="105000"/>
+                <a:satMod val="109000"/>
+                <a:tint val="81000"/>
               </a:schemeClr>
             </a:gs>
           </a:gsLst>
-          <a:lin ang="16200000" scaled="1"/>
+          <a:lin ang="5400000" scaled="0"/>
         </a:gradFill>
         <a:gradFill rotWithShape="1">
           <a:gsLst>
             <a:gs pos="0">
               <a:schemeClr val="phClr">
-                <a:tint val="100000"/>
+                <a:satMod val="103000"/>
+                <a:lumMod val="102000"/>
+                <a:tint val="94000"/>
+              </a:schemeClr>
+            </a:gs>
+            <a:gs pos="50000">
+              <a:schemeClr val="phClr">
+                <a:satMod val="110000"/>
+                <a:lumMod val="100000"/>
                 <a:shade val="100000"/>
-                <a:satMod val="130000"/>
               </a:schemeClr>
             </a:gs>
             <a:gs pos="100000">
               <a:schemeClr val="phClr">
-                <a:tint val="50000"/>
-                <a:shade val="100000"/>
-                <a:satMod val="350000"/>
+                <a:lumMod val="99000"/>
+                <a:satMod val="120000"/>
+                <a:shade val="78000"/>
               </a:schemeClr>
             </a:gs>
           </a:gsLst>
-          <a:lin ang="16200000" scaled="0"/>
+          <a:lin ang="5400000" scaled="0"/>
         </a:gradFill>
       </a:fillStyleLst>
       <a:lnStyleLst>
-        <a:ln w="9525" cap="flat" cmpd="sng" algn="ctr">
+        <a:ln w="12700" cap="flat" cmpd="sng" algn="ctr">
           <a:solidFill>
-            <a:schemeClr val="phClr">
-              <a:shade val="95000"/>
-              <a:satMod val="105000"/>
-            </a:schemeClr>
+            <a:schemeClr val="phClr"/>
           </a:solidFill>
           <a:prstDash val="solid"/>
+          <a:miter lim="800000"/>
+        </a:ln>
+        <a:ln w="19050" cap="flat" cmpd="sng" algn="ctr">
+          <a:solidFill>
+            <a:schemeClr val="phClr"/>
+          </a:solidFill>
+          <a:prstDash val="solid"/>
+          <a:miter lim="800000"/>
         </a:ln>
         <a:ln w="25400" cap="flat" cmpd="sng" algn="ctr">
           <a:solidFill>
             <a:schemeClr val="phClr"/>
           </a:solidFill>
           <a:prstDash val="solid"/>
-        </a:ln>
-        <a:ln w="38100" cap="flat" cmpd="sng" algn="ctr">
-          <a:solidFill>
-            <a:schemeClr val="phClr"/>
-          </a:solidFill>
-          <a:prstDash val="solid"/>
+          <a:miter lim="800000"/>
         </a:ln>
       </a:lnStyleLst>
       <a:effectStyleLst>
         <a:effectStyle>
+          <a:effectLst/>
+        </a:effectStyle>
+        <a:effectStyle>
+          <a:effectLst/>
+        </a:effectStyle>
+        <a:effectStyle>
           <a:effectLst>
-            <a:outerShdw blurRad="40000" dist="20000" dir="5400000" rotWithShape="0">
+            <a:outerShdw blurRad="57150" dist="19050" dir="5400000" algn="ctr" rotWithShape="0">
               <a:srgbClr val="000000">
-                <a:alpha val="38000"/>
+                <a:alpha val="63000"/>
               </a:srgbClr>
             </a:outerShdw>
           </a:effectLst>
-        </a:effectStyle>
-        <a:effectStyle>
-          <a:effectLst>
-            <a:outerShdw blurRad="40000" dist="23000" dir="5400000" rotWithShape="0">
-              <a:srgbClr val="000000">
-                <a:alpha val="35000"/>
-              </a:srgbClr>
-            </a:outerShdw>
-          </a:effectLst>
-        </a:effectStyle>
-        <a:effectStyle>
-          <a:effectLst>
-            <a:outerShdw blurRad="40000" dist="23000" dir="5400000" rotWithShape="0">
-              <a:srgbClr val="000000">
-                <a:alpha val="35000"/>
-              </a:srgbClr>
-            </a:outerShdw>
-          </a:effectLst>
-          <a:scene3d>
-            <a:camera prst="orthographicFront">
-              <a:rot lat="0" lon="0" rev="0"/>
-            </a:camera>
-            <a:lightRig rig="threePt" dir="t">
-              <a:rot lat="0" lon="0" rev="1200000"/>
-            </a:lightRig>
-          </a:scene3d>
-          <a:sp3d>
-            <a:bevelT w="63500" h="25400"/>
-          </a:sp3d>
         </a:effectStyle>
       </a:effectStyleLst>
       <a:bgFillStyleLst>
         <a:solidFill>
           <a:schemeClr val="phClr"/>
         </a:solidFill>
+        <a:solidFill>
+          <a:schemeClr val="phClr">
+            <a:tint val="95000"/>
+            <a:satMod val="170000"/>
+          </a:schemeClr>
+        </a:solidFill>
         <a:gradFill rotWithShape="1">
           <a:gsLst>
             <a:gs pos="0">
               <a:schemeClr val="phClr">
-                <a:tint val="40000"/>
-                <a:satMod val="350000"/>
+                <a:tint val="93000"/>
+                <a:satMod val="150000"/>
+                <a:shade val="98000"/>
+                <a:lumMod val="102000"/>
               </a:schemeClr>
             </a:gs>
-            <a:gs pos="40000">
+            <a:gs pos="50000">
               <a:schemeClr val="phClr">
-                <a:tint val="45000"/>
-                <a:shade val="99000"/>
-                <a:satMod val="350000"/>
+                <a:tint val="98000"/>
+                <a:satMod val="130000"/>
+                <a:shade val="90000"/>
+                <a:lumMod val="103000"/>
               </a:schemeClr>
             </a:gs>
             <a:gs pos="100000">
               <a:schemeClr val="phClr">
-                <a:shade val="20000"/>
-                <a:satMod val="255000"/>
+                <a:shade val="63000"/>
+                <a:satMod val="120000"/>
               </a:schemeClr>
             </a:gs>
           </a:gsLst>
-          <a:path path="circle">
-            <a:fillToRect l="50000" t="-80000" r="50000" b="180000"/>
-          </a:path>
-        </a:gradFill>
-        <a:gradFill rotWithShape="1">
-          <a:gsLst>
-            <a:gs pos="0">
-              <a:schemeClr val="phClr">
-                <a:tint val="80000"/>
-                <a:satMod val="300000"/>
-              </a:schemeClr>
-            </a:gs>
-            <a:gs pos="100000">
-              <a:schemeClr val="phClr">
-                <a:shade val="30000"/>
-                <a:satMod val="200000"/>
-              </a:schemeClr>
-            </a:gs>
-          </a:gsLst>
-          <a:path path="circle">
-            <a:fillToRect l="50000" t="50000" r="50000" b="50000"/>
-          </a:path>
+          <a:lin ang="5400000" scaled="0"/>
         </a:gradFill>
       </a:bgFillStyleLst>
     </a:fmtScheme>
   </a:themeElements>
   <a:objectDefaults>
-    <a:spDef>
-      <a:spPr/>
-      <a:bodyPr/>
-      <a:lstStyle/>
-      <a:style>
-        <a:lnRef idx="1">
-          <a:schemeClr val="accent1"/>
-        </a:lnRef>
-        <a:fillRef idx="3">
-          <a:schemeClr val="accent1"/>
-        </a:fillRef>
-        <a:effectRef idx="2">
-          <a:schemeClr val="accent1"/>
-        </a:effectRef>
-        <a:fontRef idx="minor">
-          <a:schemeClr val="lt1"/>
-        </a:fontRef>
-      </a:style>
-    </a:spDef>
     <a:lnDef>
       <a:spPr/>
       <a:bodyPr/>
@@ -14449,5 +14862,10 @@
     </a:lnDef>
   </a:objectDefaults>
   <a:extraClrSchemeLst/>
+  <a:extLst>
+    <a:ext uri="{05A4C25C-085E-4340-85A3-A5531E510DB2}">
+      <thm15:themeFamily xmlns:thm15="http://schemas.microsoft.com/office/thememl/2012/main" name="Office Theme" id="{2E142A2C-CD16-42D6-873A-C26D2A0506FA}" vid="{1BDDFF52-6CD6-40A5-AB3C-68EB2F1E4D0A}"/>
+    </a:ext>
+  </a:extLst>
 </a:theme>
 </file>